--- a/SQL RESTAURANT & CONSUMER ANALYSIS.pptx
+++ b/SQL RESTAURANT & CONSUMER ANALYSIS.pptx
@@ -11,16 +11,16 @@
     <p:sldId id="256" r:id="rId2"/>
     <p:sldId id="257" r:id="rId3"/>
     <p:sldId id="258" r:id="rId4"/>
-    <p:sldId id="260" r:id="rId5"/>
-    <p:sldId id="261" r:id="rId6"/>
-    <p:sldId id="262" r:id="rId7"/>
-    <p:sldId id="263" r:id="rId8"/>
-    <p:sldId id="264" r:id="rId9"/>
-    <p:sldId id="268" r:id="rId10"/>
-    <p:sldId id="265" r:id="rId11"/>
-    <p:sldId id="266" r:id="rId12"/>
-    <p:sldId id="269" r:id="rId13"/>
-    <p:sldId id="267" r:id="rId14"/>
+    <p:sldId id="270" r:id="rId5"/>
+    <p:sldId id="260" r:id="rId6"/>
+    <p:sldId id="271" r:id="rId7"/>
+    <p:sldId id="272" r:id="rId8"/>
+    <p:sldId id="263" r:id="rId9"/>
+    <p:sldId id="261" r:id="rId10"/>
+    <p:sldId id="262" r:id="rId11"/>
+    <p:sldId id="264" r:id="rId12"/>
+    <p:sldId id="265" r:id="rId13"/>
+    <p:sldId id="268" r:id="rId14"/>
     <p:sldId id="259" r:id="rId15"/>
   </p:sldIdLst>
   <p:sldSz cx="12192000" cy="6858000"/>
@@ -273,7 +273,7 @@
       <p15:sldGuideLst xmlns:p15="http://schemas.microsoft.com/office/powerpoint/2012/main"/>
     </p:ext>
     <p:ext uri="GoogleSlidesCustomDataVersion2">
-      <go:slidesCustomData xmlns:go="http://customooxmlschemas.google.com/" xmlns:ahyp="http://schemas.microsoft.com/office/drawing/2018/hyperlinkcolor" xmlns:p15="http://schemas.microsoft.com/office/powerpoint/2012/main" xmlns:p14="http://schemas.microsoft.com/office/powerpoint/2010/main" xmlns:com="http://schemas.openxmlformats.org/drawingml/2006/compatibility" xmlns:pvml="urn:schemas-microsoft-com:office:powerpoint" xmlns:v="urn:schemas-microsoft-com:vml" xmlns:o="urn:schemas-microsoft-com:office:office" xmlns:dgm="http://schemas.openxmlformats.org/drawingml/2006/diagram" xmlns:c="http://schemas.openxmlformats.org/drawingml/2006/chart" xmlns:mv="urn:schemas-microsoft-com:mac:vml" xmlns:mc="http://schemas.openxmlformats.org/markup-compatibility/2006" xmlns="" r:id="rId23" roundtripDataSignature="AMtx7mi4HmEECUlll0m8HTY06QsqsmZGGQ=="/>
+      <go:slidesCustomData xmlns="" xmlns:mc="http://schemas.openxmlformats.org/markup-compatibility/2006" xmlns:mv="urn:schemas-microsoft-com:mac:vml" xmlns:c="http://schemas.openxmlformats.org/drawingml/2006/chart" xmlns:dgm="http://schemas.openxmlformats.org/drawingml/2006/diagram" xmlns:o="urn:schemas-microsoft-com:office:office" xmlns:v="urn:schemas-microsoft-com:vml" xmlns:pvml="urn:schemas-microsoft-com:office:powerpoint" xmlns:com="http://schemas.openxmlformats.org/drawingml/2006/compatibility" xmlns:p14="http://schemas.microsoft.com/office/powerpoint/2010/main" xmlns:p15="http://schemas.microsoft.com/office/powerpoint/2012/main" xmlns:ahyp="http://schemas.microsoft.com/office/drawing/2018/hyperlinkcolor" xmlns:go="http://customooxmlschemas.google.com/" r:id="rId23" roundtripDataSignature="AMtx7mi4HmEECUlll0m8HTY06QsqsmZGGQ=="/>
     </p:ext>
   </p:extLst>
 </p:presentation>
@@ -16042,7 +16042,7 @@
           <p:cNvPr id="2" name="Title 1">
             <a:extLst>
               <a:ext uri="{FF2B5EF4-FFF2-40B4-BE49-F238E27FC236}">
-                <a16:creationId xmlns:a16="http://schemas.microsoft.com/office/drawing/2014/main" id="{3613CF49-1D1A-2AF1-82C2-675375ECD6C6}"/>
+                <a16:creationId xmlns:a16="http://schemas.microsoft.com/office/drawing/2014/main" id="{1A163A70-9A64-23E4-7998-54FB530BB434}"/>
               </a:ext>
             </a:extLst>
           </p:cNvPr>
@@ -16055,7 +16055,7 @@
         </p:nvSpPr>
         <p:spPr>
           <a:xfrm>
-            <a:off x="319725" y="0"/>
+            <a:off x="404567" y="57003"/>
             <a:ext cx="10515600" cy="1325563"/>
           </a:xfrm>
         </p:spPr>
@@ -16069,7 +16069,7 @@
                   <a:srgbClr val="FF0000"/>
                 </a:solidFill>
               </a:rPr>
-              <a:t>MY EXPERIENCE / CHALLENGES</a:t>
+              <a:t>KEY ANALYSIS QUESTIONS</a:t>
             </a:r>
           </a:p>
         </p:txBody>
@@ -16079,7 +16079,7 @@
           <p:cNvPr id="3" name="Text Placeholder 2">
             <a:extLst>
               <a:ext uri="{FF2B5EF4-FFF2-40B4-BE49-F238E27FC236}">
-                <a16:creationId xmlns:a16="http://schemas.microsoft.com/office/drawing/2014/main" id="{3DA58F8A-20F9-047B-B378-83D6139D6941}"/>
+                <a16:creationId xmlns:a16="http://schemas.microsoft.com/office/drawing/2014/main" id="{A2D3E0BF-FF36-92BD-8C6F-4AFEC5B76D1D}"/>
               </a:ext>
             </a:extLst>
           </p:cNvPr>
@@ -16092,8 +16092,8 @@
         </p:nvSpPr>
         <p:spPr>
           <a:xfrm>
-            <a:off x="696797" y="1517282"/>
-            <a:ext cx="10515600" cy="4351338"/>
+            <a:off x="725078" y="986640"/>
+            <a:ext cx="10515600" cy="5814357"/>
           </a:xfrm>
         </p:spPr>
         <p:txBody>
@@ -16103,115 +16103,95 @@
           <a:lstStyle/>
           <a:p>
             <a:pPr marL="114300" indent="0">
-              <a:lnSpc>
-                <a:spcPct val="100000"/>
-              </a:lnSpc>
               <a:buNone/>
             </a:pPr>
             <a:r>
               <a:rPr lang="en-US" sz="2000" b="1" dirty="0"/>
-              <a:t>Challenge 1 — Complex JOINs</a:t>
-            </a:r>
-          </a:p>
-          <a:p>
-            <a:pPr>
-              <a:lnSpc>
-                <a:spcPct val="100000"/>
-              </a:lnSpc>
+              <a:t>Key Analysis Questions / Use Cases</a:t>
+            </a:r>
+          </a:p>
+          <a:p>
+            <a:pPr marL="114300" indent="0">
+              <a:buNone/>
             </a:pPr>
             <a:r>
               <a:rPr lang="en-US" sz="2000" b="1" dirty="0"/>
-              <a:t>Problem:</a:t>
-            </a:r>
-            <a:br>
+              <a:t>Rating Analysis</a:t>
+            </a:r>
+          </a:p>
+          <a:p>
+            <a:r>
               <a:rPr lang="en-US" sz="2000" dirty="0"/>
-            </a:br>
+              <a:t>Find restaurants rated in specific cities </a:t>
+            </a:r>
+          </a:p>
+          <a:p>
             <a:r>
               <a:rPr lang="en-US" sz="2000" dirty="0"/>
-              <a:t>Connecting multiple tables was difficult initially.</a:t>
-            </a:r>
-          </a:p>
-          <a:p>
-            <a:pPr>
-              <a:lnSpc>
-                <a:spcPct val="100000"/>
-              </a:lnSpc>
+              <a:t>Find consumers with food ratings below the average </a:t>
+            </a:r>
+          </a:p>
+          <a:p>
+            <a:r>
+              <a:rPr lang="en-US" sz="2000" dirty="0"/>
+              <a:t>Identify consumers who rated non-Italian restaurants </a:t>
+            </a:r>
+          </a:p>
+          <a:p>
+            <a:r>
+              <a:rPr lang="en-US" sz="2000" dirty="0"/>
+              <a:t>Compare food and service ratings </a:t>
+            </a:r>
+          </a:p>
+          <a:p>
+            <a:r>
+              <a:rPr lang="en-US" sz="2000" dirty="0"/>
+              <a:t>Find restaurants performing above the average </a:t>
+            </a:r>
+          </a:p>
+          <a:p>
+            <a:pPr marL="114300" indent="0">
+              <a:lnSpc>
+                <a:spcPct val="150000"/>
+              </a:lnSpc>
+              <a:buNone/>
             </a:pPr>
             <a:r>
               <a:rPr lang="en-US" sz="2000" b="1" dirty="0"/>
-              <a:t>Solution:</a:t>
-            </a:r>
-            <a:br>
+              <a:t>Advanced Analysis</a:t>
+            </a:r>
+          </a:p>
+          <a:p>
+            <a:r>
               <a:rPr lang="en-US" sz="2000" dirty="0"/>
-            </a:br>
+              <a:t>Rank restaurants based on ratings </a:t>
+            </a:r>
+          </a:p>
+          <a:p>
             <a:r>
               <a:rPr lang="en-US" sz="2000" dirty="0"/>
-              <a:t>I understood the relationships between tables and tested the JOINs step by step.</a:t>
-            </a:r>
-          </a:p>
-          <a:p>
-            <a:pPr marL="114300" indent="0">
-              <a:lnSpc>
-                <a:spcPct val="100000"/>
-              </a:lnSpc>
-              <a:buNone/>
-            </a:pPr>
-            <a:endParaRPr lang="en-US" sz="2000" dirty="0"/>
-          </a:p>
-          <a:p>
-            <a:pPr marL="114300" indent="0">
-              <a:lnSpc>
-                <a:spcPct val="100000"/>
-              </a:lnSpc>
-              <a:buNone/>
-            </a:pPr>
-            <a:r>
-              <a:rPr lang="en-US" sz="2000" b="1" dirty="0"/>
-              <a:t>Challenge 2 — Window Functions</a:t>
-            </a:r>
-          </a:p>
-          <a:p>
-            <a:pPr>
-              <a:lnSpc>
-                <a:spcPct val="100000"/>
-              </a:lnSpc>
-            </a:pPr>
-            <a:r>
-              <a:rPr lang="en-US" sz="2000" b="1" dirty="0"/>
-              <a:t>Problem:</a:t>
-            </a:r>
-            <a:br>
+              <a:t>Analyze rating patterns within restaurants </a:t>
+            </a:r>
+          </a:p>
+          <a:p>
+            <a:r>
               <a:rPr lang="en-US" sz="2000" dirty="0"/>
-            </a:br>
+              <a:t>Find top preferred cuisines </a:t>
+            </a:r>
+          </a:p>
+          <a:p>
             <a:r>
               <a:rPr lang="en-US" sz="2000" dirty="0"/>
-              <a:t>Understanding PARTITION BY and ORDER BY was challenging.</a:t>
-            </a:r>
-          </a:p>
-          <a:p>
-            <a:pPr>
-              <a:lnSpc>
-                <a:spcPct val="100000"/>
-              </a:lnSpc>
-            </a:pPr>
-            <a:r>
-              <a:rPr lang="en-US" sz="2000" b="1" dirty="0"/>
-              <a:t>Solution:</a:t>
-            </a:r>
-            <a:br>
+              <a:t>Compare consumer and restaurant performance </a:t>
+            </a:r>
+          </a:p>
+          <a:p>
+            <a:r>
               <a:rPr lang="en-US" sz="2000" dirty="0"/>
-            </a:br>
-            <a:r>
-              <a:rPr lang="en-US" sz="2000" dirty="0"/>
-              <a:t>I started with simple ranking queries and gradually moved to complex queries.</a:t>
-            </a:r>
-          </a:p>
-          <a:p>
-            <a:pPr>
-              <a:lnSpc>
-                <a:spcPct val="100000"/>
-              </a:lnSpc>
-            </a:pPr>
+              <a:t>Use multiple tables to answer complex questions</a:t>
+            </a:r>
+          </a:p>
+          <a:p>
             <a:endParaRPr lang="en-US" sz="2000" dirty="0"/>
           </a:p>
         </p:txBody>
@@ -16219,7 +16199,7 @@
     </p:spTree>
     <p:extLst>
       <p:ext uri="{BB962C8B-B14F-4D97-AF65-F5344CB8AC3E}">
-        <p14:creationId xmlns:p14="http://schemas.microsoft.com/office/powerpoint/2010/main" val="1505086758"/>
+        <p14:creationId xmlns:p14="http://schemas.microsoft.com/office/powerpoint/2010/main" val="1229960937"/>
       </p:ext>
     </p:extLst>
   </p:cSld>
@@ -16251,7 +16231,7 @@
           <p:cNvPr id="2" name="Title 1">
             <a:extLst>
               <a:ext uri="{FF2B5EF4-FFF2-40B4-BE49-F238E27FC236}">
-                <a16:creationId xmlns:a16="http://schemas.microsoft.com/office/drawing/2014/main" id="{E6A65896-26CD-EFDD-FF01-A07E6307129C}"/>
+                <a16:creationId xmlns:a16="http://schemas.microsoft.com/office/drawing/2014/main" id="{A639F0B5-8A63-94DF-2893-3AC2C008DB22}"/>
               </a:ext>
             </a:extLst>
           </p:cNvPr>
@@ -16264,7 +16244,7 @@
         </p:nvSpPr>
         <p:spPr>
           <a:xfrm>
-            <a:off x="253738" y="18255"/>
+            <a:off x="357433" y="18255"/>
             <a:ext cx="10515600" cy="1325563"/>
           </a:xfrm>
         </p:spPr>
@@ -16278,9 +16258,8 @@
                   <a:srgbClr val="FF0000"/>
                 </a:solidFill>
               </a:rPr>
-              <a:t>MY EXPERIENCE / CHALLENGES</a:t>
-            </a:r>
-            <a:endParaRPr lang="en-US" dirty="0"/>
+              <a:t>OVERALL KEY FINDINGS</a:t>
+            </a:r>
           </a:p>
         </p:txBody>
       </p:sp>
@@ -16289,7 +16268,7 @@
           <p:cNvPr id="3" name="Text Placeholder 2">
             <a:extLst>
               <a:ext uri="{FF2B5EF4-FFF2-40B4-BE49-F238E27FC236}">
-                <a16:creationId xmlns:a16="http://schemas.microsoft.com/office/drawing/2014/main" id="{DAB0F043-0CC6-D0C2-14CC-EF3991BC9BCE}"/>
+                <a16:creationId xmlns:a16="http://schemas.microsoft.com/office/drawing/2014/main" id="{66D51BC1-6A4C-4009-A63A-1F0912A8EA78}"/>
               </a:ext>
             </a:extLst>
           </p:cNvPr>
@@ -16302,117 +16281,97 @@
         </p:nvSpPr>
         <p:spPr>
           <a:xfrm>
-            <a:off x="611957" y="1505114"/>
-            <a:ext cx="10515600" cy="4351338"/>
+            <a:off x="687371" y="999242"/>
+            <a:ext cx="10515600" cy="5495826"/>
           </a:xfrm>
         </p:spPr>
         <p:txBody>
           <a:bodyPr>
-            <a:normAutofit/>
+            <a:noAutofit/>
           </a:bodyPr>
           <a:lstStyle/>
           <a:p>
             <a:pPr marL="114300" indent="0">
-              <a:lnSpc>
-                <a:spcPct val="100000"/>
-              </a:lnSpc>
               <a:buNone/>
             </a:pPr>
             <a:r>
+              <a:rPr lang="en-US" sz="2000" dirty="0"/>
+              <a:t>From the analysis questions, the project helps us understand:</a:t>
+            </a:r>
+          </a:p>
+          <a:p>
+            <a:pPr marL="114300" indent="0">
+              <a:buNone/>
+            </a:pPr>
+            <a:r>
               <a:rPr lang="en-US" sz="2000" b="1" dirty="0"/>
-              <a:t>Challenge 3 — Subqueries &amp; CTEs</a:t>
-            </a:r>
-          </a:p>
-          <a:p>
-            <a:pPr>
-              <a:lnSpc>
-                <a:spcPct val="100000"/>
-              </a:lnSpc>
+              <a:t>Consumer Insights</a:t>
+            </a:r>
+          </a:p>
+          <a:p>
+            <a:r>
+              <a:rPr lang="en-US" sz="2000" dirty="0"/>
+              <a:t>Consumer information can be studied using age, occupation, city, budget, and preferences. </a:t>
+            </a:r>
+          </a:p>
+          <a:p>
+            <a:r>
+              <a:rPr lang="en-US" sz="2000" dirty="0"/>
+              <a:t>Consumer preferences can be connected with their restaurant ratings. </a:t>
+            </a:r>
+          </a:p>
+          <a:p>
+            <a:r>
+              <a:rPr lang="en-US" sz="2000" dirty="0"/>
+              <a:t>Different consumer groups can be identified using SQL conditions. </a:t>
+            </a:r>
+          </a:p>
+          <a:p>
+            <a:pPr marL="114300" indent="0">
+              <a:buNone/>
             </a:pPr>
             <a:r>
               <a:rPr lang="en-US" sz="2000" b="1" dirty="0"/>
-              <a:t>Problem:</a:t>
-            </a:r>
-            <a:br>
+              <a:t>Restaurant Insights</a:t>
+            </a:r>
+          </a:p>
+          <a:p>
+            <a:r>
               <a:rPr lang="en-US" sz="2000" dirty="0"/>
-            </a:br>
+              <a:t>Restaurants can be compared based on price, cuisine, location, franchise status, and services. </a:t>
+            </a:r>
+          </a:p>
+          <a:p>
             <a:r>
               <a:rPr lang="en-US" sz="2000" dirty="0"/>
-              <a:t>Understanding when to use subqueries and CTEs.</a:t>
-            </a:r>
-          </a:p>
-          <a:p>
-            <a:pPr>
-              <a:lnSpc>
-                <a:spcPct val="100000"/>
-              </a:lnSpc>
+              <a:t>Restaurant ratings can be analyzed along with their other details. </a:t>
+            </a:r>
+          </a:p>
+          <a:p>
+            <a:pPr marL="114300" indent="0">
+              <a:buNone/>
             </a:pPr>
             <a:r>
               <a:rPr lang="en-US" sz="2000" b="1" dirty="0"/>
-              <a:t>Solution:</a:t>
-            </a:r>
-            <a:br>
+              <a:t>Rating Insights</a:t>
+            </a:r>
+          </a:p>
+          <a:p>
+            <a:r>
               <a:rPr lang="en-US" sz="2000" dirty="0"/>
-            </a:br>
+              <a:t>Overall, Food, and Service ratings can be compared. </a:t>
+            </a:r>
+          </a:p>
+          <a:p>
             <a:r>
               <a:rPr lang="en-US" sz="2000" dirty="0"/>
-              <a:t>I practiced different queries and compared the results.</a:t>
-            </a:r>
-          </a:p>
-          <a:p>
-            <a:pPr>
-              <a:lnSpc>
-                <a:spcPct val="100000"/>
-              </a:lnSpc>
-            </a:pPr>
-            <a:endParaRPr lang="en-US" sz="2000" dirty="0"/>
-          </a:p>
-          <a:p>
-            <a:pPr marL="114300" indent="0">
-              <a:lnSpc>
-                <a:spcPct val="100000"/>
-              </a:lnSpc>
-              <a:buNone/>
-            </a:pPr>
-            <a:r>
-              <a:rPr lang="en-US" sz="2000" b="1" dirty="0"/>
-              <a:t>Challenge 4 — Stored Procedures</a:t>
-            </a:r>
-          </a:p>
-          <a:p>
-            <a:pPr>
-              <a:lnSpc>
-                <a:spcPct val="100000"/>
-              </a:lnSpc>
-            </a:pPr>
-            <a:r>
-              <a:rPr lang="en-US" sz="2000" b="1" dirty="0"/>
-              <a:t>Problem:</a:t>
-            </a:r>
-            <a:br>
+              <a:t>Average ratings can be used to compare restaurant performance. </a:t>
+            </a:r>
+          </a:p>
+          <a:p>
+            <a:r>
               <a:rPr lang="en-US" sz="2000" dirty="0"/>
-            </a:br>
-            <a:r>
-              <a:rPr lang="en-US" sz="2000" dirty="0"/>
-              <a:t>Handling parameters and complex query logic.</a:t>
-            </a:r>
-          </a:p>
-          <a:p>
-            <a:pPr>
-              <a:lnSpc>
-                <a:spcPct val="100000"/>
-              </a:lnSpc>
-            </a:pPr>
-            <a:r>
-              <a:rPr lang="en-US" sz="2000" b="1" dirty="0"/>
-              <a:t>Solution:</a:t>
-            </a:r>
-            <a:br>
-              <a:rPr lang="en-US" sz="2000" dirty="0"/>
-            </a:br>
-            <a:r>
-              <a:rPr lang="en-US" sz="2000" dirty="0"/>
-              <a:t>I created the procedure step by step and tested it using CALL.</a:t>
+              <a:t>Ranking can help identify highly-rated restaurants.</a:t>
             </a:r>
           </a:p>
         </p:txBody>
@@ -16420,7 +16379,7 @@
     </p:spTree>
     <p:extLst>
       <p:ext uri="{BB962C8B-B14F-4D97-AF65-F5344CB8AC3E}">
-        <p14:creationId xmlns:p14="http://schemas.microsoft.com/office/powerpoint/2010/main" val="2886476479"/>
+        <p14:creationId xmlns:p14="http://schemas.microsoft.com/office/powerpoint/2010/main" val="506912973"/>
       </p:ext>
     </p:extLst>
   </p:cSld>
@@ -16452,7 +16411,7 @@
           <p:cNvPr id="2" name="Title 1">
             <a:extLst>
               <a:ext uri="{FF2B5EF4-FFF2-40B4-BE49-F238E27FC236}">
-                <a16:creationId xmlns:a16="http://schemas.microsoft.com/office/drawing/2014/main" id="{1442E0A5-840F-F021-C75A-471E8B7B9582}"/>
+                <a16:creationId xmlns:a16="http://schemas.microsoft.com/office/drawing/2014/main" id="{3613CF49-1D1A-2AF1-82C2-675375ECD6C6}"/>
               </a:ext>
             </a:extLst>
           </p:cNvPr>
@@ -16465,7 +16424,7 @@
         </p:nvSpPr>
         <p:spPr>
           <a:xfrm>
-            <a:off x="187751" y="18255"/>
+            <a:off x="319725" y="0"/>
             <a:ext cx="10515600" cy="1325563"/>
           </a:xfrm>
         </p:spPr>
@@ -16479,7 +16438,7 @@
                   <a:srgbClr val="FF0000"/>
                 </a:solidFill>
               </a:rPr>
-              <a:t>WHAT I LEARNED</a:t>
+              <a:t>MY EXPERIENCE / CHALLENGES</a:t>
             </a:r>
           </a:p>
         </p:txBody>
@@ -16489,7 +16448,7 @@
           <p:cNvPr id="3" name="Text Placeholder 2">
             <a:extLst>
               <a:ext uri="{FF2B5EF4-FFF2-40B4-BE49-F238E27FC236}">
-                <a16:creationId xmlns:a16="http://schemas.microsoft.com/office/drawing/2014/main" id="{B46D9151-201A-DF12-2F38-631256920607}"/>
+                <a16:creationId xmlns:a16="http://schemas.microsoft.com/office/drawing/2014/main" id="{3DA58F8A-20F9-047B-B378-83D6139D6941}"/>
               </a:ext>
             </a:extLst>
           </p:cNvPr>
@@ -16502,8 +16461,8 @@
         </p:nvSpPr>
         <p:spPr>
           <a:xfrm>
-            <a:off x="424207" y="1343818"/>
-            <a:ext cx="10675070" cy="5451867"/>
+            <a:off x="687370" y="1325563"/>
+            <a:ext cx="10515600" cy="4977786"/>
           </a:xfrm>
         </p:spPr>
         <p:txBody>
@@ -16519,8 +16478,8 @@
               <a:buNone/>
             </a:pPr>
             <a:r>
-              <a:rPr lang="en-US" sz="1700" b="1" dirty="0"/>
-              <a:t>Key Learnings</a:t>
+              <a:rPr lang="en-US" sz="2000" b="1" dirty="0"/>
+              <a:t>Understanding Tables</a:t>
             </a:r>
           </a:p>
           <a:p>
@@ -16530,8 +16489,28 @@
               </a:lnSpc>
             </a:pPr>
             <a:r>
-              <a:rPr lang="en-US" sz="1700" dirty="0"/>
-              <a:t>Test queries step-by-step, don't write everything at once</a:t>
+              <a:rPr lang="en-US" sz="2000" dirty="0"/>
+              <a:t>At first, understanding how the tables were connected was difficult.</a:t>
+            </a:r>
+            <a:br>
+              <a:rPr lang="en-US" sz="2000" dirty="0"/>
+            </a:br>
+            <a:r>
+              <a:rPr lang="en-US" sz="2000" b="1" dirty="0"/>
+              <a:t>I solved it by checking the common IDs and relationships.</a:t>
+            </a:r>
+            <a:endParaRPr lang="en-US" sz="2000" dirty="0"/>
+          </a:p>
+          <a:p>
+            <a:pPr marL="114300" indent="0">
+              <a:lnSpc>
+                <a:spcPct val="100000"/>
+              </a:lnSpc>
+              <a:buNone/>
+            </a:pPr>
+            <a:r>
+              <a:rPr lang="en-US" sz="2000" b="1" dirty="0"/>
+              <a:t>Using JOINs</a:t>
             </a:r>
           </a:p>
           <a:p>
@@ -16541,8 +16520,28 @@
               </a:lnSpc>
             </a:pPr>
             <a:r>
-              <a:rPr lang="en-US" sz="1700" dirty="0"/>
-              <a:t>CTEs make complex queries readable</a:t>
+              <a:rPr lang="en-US" sz="2000" dirty="0"/>
+              <a:t>Joining multiple tables was a little challenging.</a:t>
+            </a:r>
+            <a:br>
+              <a:rPr lang="en-US" sz="2000" dirty="0"/>
+            </a:br>
+            <a:r>
+              <a:rPr lang="en-US" sz="2000" b="1" dirty="0"/>
+              <a:t>I practiced different JOINs and checked the results step by step.</a:t>
+            </a:r>
+            <a:endParaRPr lang="en-US" sz="2000" dirty="0"/>
+          </a:p>
+          <a:p>
+            <a:pPr marL="114300" indent="0">
+              <a:lnSpc>
+                <a:spcPct val="100000"/>
+              </a:lnSpc>
+              <a:buNone/>
+            </a:pPr>
+            <a:r>
+              <a:rPr lang="en-US" sz="2000" b="1" dirty="0"/>
+              <a:t>Learning Advanced SQL</a:t>
             </a:r>
           </a:p>
           <a:p>
@@ -16552,8 +16551,28 @@
               </a:lnSpc>
             </a:pPr>
             <a:r>
-              <a:rPr lang="en-US" sz="1700" dirty="0"/>
-              <a:t>Indexes improve query speed significantly</a:t>
+              <a:rPr lang="en-US" sz="2000" dirty="0"/>
+              <a:t>CTEs and Window Functions were new to me.</a:t>
+            </a:r>
+            <a:br>
+              <a:rPr lang="en-US" sz="2000" dirty="0"/>
+            </a:br>
+            <a:r>
+              <a:rPr lang="en-US" sz="2000" b="1" dirty="0"/>
+              <a:t>I practiced simple examples first and then used them in the project.</a:t>
+            </a:r>
+            <a:endParaRPr lang="en-US" sz="2000" dirty="0"/>
+          </a:p>
+          <a:p>
+            <a:pPr marL="114300" indent="0">
+              <a:lnSpc>
+                <a:spcPct val="100000"/>
+              </a:lnSpc>
+              <a:buNone/>
+            </a:pPr>
+            <a:r>
+              <a:rPr lang="en-US" sz="2000" b="1" dirty="0"/>
+              <a:t>Writing Complex Queries</a:t>
             </a:r>
           </a:p>
           <a:p>
@@ -16563,91 +16582,24 @@
               </a:lnSpc>
             </a:pPr>
             <a:r>
-              <a:rPr lang="en-US" sz="1700" dirty="0"/>
-              <a:t>Window functions are powerful tools</a:t>
-            </a:r>
-          </a:p>
-          <a:p>
-            <a:pPr>
-              <a:lnSpc>
-                <a:spcPct val="100000"/>
-              </a:lnSpc>
-            </a:pPr>
-            <a:r>
-              <a:rPr lang="en-US" sz="1700" dirty="0"/>
-              <a:t>Always verify results with sample data</a:t>
-            </a:r>
-          </a:p>
-          <a:p>
-            <a:pPr>
-              <a:lnSpc>
-                <a:spcPct val="100000"/>
-              </a:lnSpc>
-            </a:pPr>
-            <a:endParaRPr lang="en-US" sz="1700" dirty="0"/>
-          </a:p>
-          <a:p>
-            <a:pPr marL="114300" indent="0">
-              <a:lnSpc>
-                <a:spcPct val="100000"/>
-              </a:lnSpc>
-              <a:buNone/>
-            </a:pPr>
-            <a:r>
-              <a:rPr lang="en-US" sz="1700" b="1" dirty="0"/>
-              <a:t>Skills Gained</a:t>
-            </a:r>
-          </a:p>
-          <a:p>
-            <a:pPr>
-              <a:lnSpc>
-                <a:spcPct val="100000"/>
-              </a:lnSpc>
-            </a:pPr>
-            <a:r>
-              <a:rPr lang="en-US" sz="1700" dirty="0"/>
-              <a:t>Advanced SQL programming</a:t>
-            </a:r>
-          </a:p>
-          <a:p>
-            <a:pPr>
-              <a:lnSpc>
-                <a:spcPct val="100000"/>
-              </a:lnSpc>
-            </a:pPr>
-            <a:r>
-              <a:rPr lang="en-US" sz="1700" dirty="0"/>
-              <a:t>Database optimization</a:t>
-            </a:r>
-          </a:p>
-          <a:p>
-            <a:pPr>
-              <a:lnSpc>
-                <a:spcPct val="100000"/>
-              </a:lnSpc>
-            </a:pPr>
-            <a:r>
-              <a:rPr lang="en-US" sz="1700" dirty="0"/>
-              <a:t>Problem-solving with data</a:t>
-            </a:r>
-          </a:p>
-          <a:p>
-            <a:pPr>
-              <a:lnSpc>
-                <a:spcPct val="100000"/>
-              </a:lnSpc>
-            </a:pPr>
-            <a:r>
-              <a:rPr lang="en-US" sz="1700" dirty="0"/>
-              <a:t>Professional coding practices</a:t>
-            </a:r>
+              <a:rPr lang="en-US" sz="2000" dirty="0"/>
+              <a:t>Some questions needed multiple tables and conditions.</a:t>
+            </a:r>
+            <a:br>
+              <a:rPr lang="en-US" sz="2000" dirty="0"/>
+            </a:br>
+            <a:r>
+              <a:rPr lang="en-US" sz="2000" b="1" dirty="0"/>
+              <a:t>I broke the questions into small steps and built the queries one by one.</a:t>
+            </a:r>
+            <a:endParaRPr lang="en-US" sz="2000" dirty="0"/>
           </a:p>
         </p:txBody>
       </p:sp>
     </p:spTree>
     <p:extLst>
       <p:ext uri="{BB962C8B-B14F-4D97-AF65-F5344CB8AC3E}">
-        <p14:creationId xmlns:p14="http://schemas.microsoft.com/office/powerpoint/2010/main" val="381684118"/>
+        <p14:creationId xmlns:p14="http://schemas.microsoft.com/office/powerpoint/2010/main" val="1505086758"/>
       </p:ext>
     </p:extLst>
   </p:cSld>
@@ -16662,7 +16614,13 @@
   <p:cSld>
     <p:spTree>
       <p:nvGrpSpPr>
-        <p:cNvPr id="1" name=""/>
+        <p:cNvPr id="1" name="">
+          <a:extLst>
+            <a:ext uri="{FF2B5EF4-FFF2-40B4-BE49-F238E27FC236}">
+              <a16:creationId xmlns:a16="http://schemas.microsoft.com/office/drawing/2014/main" id="{88255C3C-1F91-0724-B860-CAB57270C8D5}"/>
+            </a:ext>
+          </a:extLst>
+        </p:cNvPr>
         <p:cNvGrpSpPr/>
         <p:nvPr/>
       </p:nvGrpSpPr>
@@ -16679,7 +16637,7 @@
           <p:cNvPr id="2" name="Title 1">
             <a:extLst>
               <a:ext uri="{FF2B5EF4-FFF2-40B4-BE49-F238E27FC236}">
-                <a16:creationId xmlns:a16="http://schemas.microsoft.com/office/drawing/2014/main" id="{12BA4C3D-3349-B35A-9374-8A54B4C77E71}"/>
+                <a16:creationId xmlns:a16="http://schemas.microsoft.com/office/drawing/2014/main" id="{DBAAE639-3F5F-6371-7C0F-57A3E71B4D64}"/>
               </a:ext>
             </a:extLst>
           </p:cNvPr>
@@ -16692,7 +16650,7 @@
         </p:nvSpPr>
         <p:spPr>
           <a:xfrm>
-            <a:off x="517689" y="0"/>
+            <a:off x="357433" y="18255"/>
             <a:ext cx="10515600" cy="1325563"/>
           </a:xfrm>
         </p:spPr>
@@ -16706,7 +16664,7 @@
                   <a:srgbClr val="FF0000"/>
                 </a:solidFill>
               </a:rPr>
-              <a:t>Q&amp;A</a:t>
+              <a:t>CONCLUSION</a:t>
             </a:r>
           </a:p>
         </p:txBody>
@@ -16716,7 +16674,7 @@
           <p:cNvPr id="3" name="Text Placeholder 2">
             <a:extLst>
               <a:ext uri="{FF2B5EF4-FFF2-40B4-BE49-F238E27FC236}">
-                <a16:creationId xmlns:a16="http://schemas.microsoft.com/office/drawing/2014/main" id="{C5E14490-2751-0D55-47C8-287CDBDD1C99}"/>
+                <a16:creationId xmlns:a16="http://schemas.microsoft.com/office/drawing/2014/main" id="{DC00618E-8E28-8BC8-1954-16943963DB6A}"/>
               </a:ext>
             </a:extLst>
           </p:cNvPr>
@@ -16729,13 +16687,13 @@
         </p:nvSpPr>
         <p:spPr>
           <a:xfrm>
-            <a:off x="659090" y="1027088"/>
-            <a:ext cx="11105561" cy="5713078"/>
+            <a:off x="753359" y="1343818"/>
+            <a:ext cx="10515600" cy="4833145"/>
           </a:xfrm>
         </p:spPr>
         <p:txBody>
           <a:bodyPr>
-            <a:noAutofit/>
+            <a:normAutofit/>
           </a:bodyPr>
           <a:lstStyle/>
           <a:p>
@@ -16744,8 +16702,79 @@
             </a:pPr>
             <a:r>
               <a:rPr lang="en-US" sz="2000" b="1" dirty="0"/>
-              <a:t>Questions &amp; Answers</a:t>
-            </a:r>
+              <a:t>Conclusion</a:t>
+            </a:r>
+          </a:p>
+          <a:p>
+            <a:r>
+              <a:rPr lang="en-US" sz="2000" dirty="0"/>
+              <a:t>The project helped me analyze restaurant and consumer data using SQL. </a:t>
+            </a:r>
+          </a:p>
+          <a:p>
+            <a:r>
+              <a:rPr lang="en-US" sz="2000" dirty="0"/>
+              <a:t>I worked with multiple related tables and used different types of JOINs. </a:t>
+            </a:r>
+          </a:p>
+          <a:p>
+            <a:r>
+              <a:rPr lang="en-US" sz="2000" dirty="0"/>
+              <a:t>I used </a:t>
+            </a:r>
+            <a:r>
+              <a:rPr lang="en-US" sz="2000" b="1" dirty="0"/>
+              <a:t>aggregation, subqueries and filtering</a:t>
+            </a:r>
+            <a:r>
+              <a:rPr lang="en-US" sz="2000" dirty="0"/>
+              <a:t> to answer analysis questions. </a:t>
+            </a:r>
+          </a:p>
+          <a:p>
+            <a:r>
+              <a:rPr lang="en-US" sz="2000" dirty="0"/>
+              <a:t>I applied advanced SQL concepts such as </a:t>
+            </a:r>
+            <a:r>
+              <a:rPr lang="en-US" sz="2000" b="1" dirty="0"/>
+              <a:t>CTEs and Window Functions</a:t>
+            </a:r>
+            <a:r>
+              <a:rPr lang="en-US" sz="2000" dirty="0"/>
+              <a:t>. </a:t>
+            </a:r>
+          </a:p>
+          <a:p>
+            <a:r>
+              <a:rPr lang="en-US" sz="2000" dirty="0"/>
+              <a:t>I also worked with </a:t>
+            </a:r>
+            <a:r>
+              <a:rPr lang="en-US" sz="2000" b="1" dirty="0"/>
+              <a:t>Views and Stored Procedures</a:t>
+            </a:r>
+            <a:r>
+              <a:rPr lang="en-US" sz="2000" dirty="0"/>
+              <a:t>. </a:t>
+            </a:r>
+          </a:p>
+          <a:p>
+            <a:r>
+              <a:rPr lang="en-US" sz="2000" dirty="0"/>
+              <a:t>The analysis helped identify patterns in </a:t>
+            </a:r>
+            <a:r>
+              <a:rPr lang="en-US" sz="2000" b="1" dirty="0"/>
+              <a:t>consumer preferences, restaurant performance and ratings</a:t>
+            </a:r>
+            <a:r>
+              <a:rPr lang="en-US" sz="2000" dirty="0"/>
+              <a:t>. </a:t>
+            </a:r>
+          </a:p>
+          <a:p>
+            <a:endParaRPr lang="en-US" sz="2000" dirty="0"/>
           </a:p>
           <a:p>
             <a:pPr marL="114300" indent="0">
@@ -16753,127 +16782,16 @@
             </a:pPr>
             <a:r>
               <a:rPr lang="en-US" sz="2000" b="1" dirty="0"/>
-              <a:t>❓ Do you have any questions about:</a:t>
-            </a:r>
-          </a:p>
-          <a:p>
-            <a:pPr marL="114300" indent="0">
-              <a:lnSpc>
-                <a:spcPct val="150000"/>
-              </a:lnSpc>
-              <a:buNone/>
-            </a:pPr>
+              <a:t>Overall Learning</a:t>
+            </a:r>
+          </a:p>
+          <a:p>
             <a:r>
               <a:rPr lang="en-US" sz="2000" dirty="0"/>
-              <a:t>   • Query logic or SQL concepts?</a:t>
-            </a:r>
-          </a:p>
-          <a:p>
-            <a:pPr marL="114300" indent="0">
-              <a:buNone/>
-            </a:pPr>
-            <a:r>
-              <a:rPr lang="en-US" sz="2000" dirty="0"/>
-              <a:t>   • Database design decisions?</a:t>
-            </a:r>
-          </a:p>
-          <a:p>
-            <a:pPr marL="114300" indent="0">
-              <a:buNone/>
-            </a:pPr>
-            <a:r>
-              <a:rPr lang="en-US" sz="2000" dirty="0"/>
-              <a:t>   • Analysis methodology?</a:t>
-            </a:r>
-          </a:p>
-          <a:p>
-            <a:pPr marL="114300" indent="0">
-              <a:buNone/>
-            </a:pPr>
-            <a:r>
-              <a:rPr lang="en-US" sz="2000" dirty="0"/>
-              <a:t>   • Business insights?</a:t>
-            </a:r>
-          </a:p>
-          <a:p>
-            <a:pPr marL="114300" indent="0">
-              <a:buNone/>
-            </a:pPr>
-            <a:r>
-              <a:rPr lang="en-US" sz="2000" dirty="0"/>
-              <a:t>   • Future enhancements?</a:t>
-            </a:r>
-            <a:endParaRPr lang="en-US" sz="2000" b="1" dirty="0"/>
-          </a:p>
-          <a:p>
-            <a:pPr marL="114300" indent="0">
-              <a:lnSpc>
-                <a:spcPct val="150000"/>
-              </a:lnSpc>
-              <a:buNone/>
-            </a:pPr>
-            <a:r>
-              <a:rPr lang="en-US" sz="2000" b="1" dirty="0"/>
-              <a:t>📧 Contact:</a:t>
-            </a:r>
-          </a:p>
-          <a:p>
-            <a:pPr marL="114300" indent="0">
-              <a:buNone/>
-            </a:pPr>
-            <a:r>
-              <a:rPr lang="en-US" sz="2000" dirty="0"/>
-              <a:t>   Email: sk.ramthu.23@gmail.com</a:t>
-            </a:r>
-          </a:p>
-          <a:p>
-            <a:pPr marL="114300" indent="0">
-              <a:buNone/>
-            </a:pPr>
-            <a:r>
-              <a:rPr lang="en-US" sz="2000" dirty="0"/>
-              <a:t>   LinkedIn</a:t>
-            </a:r>
-            <a:r>
-              <a:rPr lang="en-US" sz="2000"/>
-              <a:t>: </a:t>
-            </a:r>
-            <a:r>
-              <a:rPr lang="en-US" sz="2000">
-                <a:hlinkClick r:id="rId2"/>
-              </a:rPr>
-              <a:t>https://lnkd.in/p/gPNS8Kyp</a:t>
-            </a:r>
-            <a:endParaRPr lang="en-US" sz="2000"/>
-          </a:p>
-          <a:p>
-            <a:pPr marL="114300" indent="0">
-              <a:buNone/>
-            </a:pPr>
-            <a:r>
-              <a:rPr lang="en-US" sz="2000"/>
-              <a:t>   </a:t>
-            </a:r>
-            <a:r>
-              <a:rPr lang="en-US" sz="2000" dirty="0"/>
-              <a:t>GitHub: </a:t>
-            </a:r>
-            <a:r>
-              <a:rPr lang="en-US" sz="2000" dirty="0">
-                <a:hlinkClick r:id="rId3"/>
-              </a:rPr>
-              <a:t>https://github.com/Ramthu-info/SQL-Restaurant-Consumer-Analysis</a:t>
-            </a:r>
-            <a:endParaRPr lang="en-US" sz="2000" dirty="0"/>
-          </a:p>
-          <a:p>
-            <a:pPr marL="114300" indent="0">
-              <a:buNone/>
-            </a:pPr>
-            <a:r>
-              <a:rPr lang="en-US" sz="2000" b="1" dirty="0"/>
-              <a:t>💡 Thank you for your attention!</a:t>
-            </a:r>
+              <a:t>This project helped me understand how SQL can be used to analyze real-world data and generate useful insights.</a:t>
+            </a:r>
+          </a:p>
+          <a:p>
             <a:endParaRPr lang="en-US" sz="2000" dirty="0"/>
           </a:p>
         </p:txBody>
@@ -16881,7 +16799,7 @@
     </p:spTree>
     <p:extLst>
       <p:ext uri="{BB962C8B-B14F-4D97-AF65-F5344CB8AC3E}">
-        <p14:creationId xmlns:p14="http://schemas.microsoft.com/office/powerpoint/2010/main" val="2544685134"/>
+        <p14:creationId xmlns:p14="http://schemas.microsoft.com/office/powerpoint/2010/main" val="3746234198"/>
       </p:ext>
     </p:extLst>
   </p:cSld>
@@ -17544,8 +17462,8 @@
         </p:nvSpPr>
         <p:spPr>
           <a:xfrm>
-            <a:off x="378155" y="18255"/>
-            <a:ext cx="10515600" cy="1325563"/>
+            <a:off x="170765" y="27782"/>
+            <a:ext cx="10515600" cy="1004453"/>
           </a:xfrm>
           <a:prstGeom prst="rect">
             <a:avLst/>
@@ -17596,18 +17514,24 @@
       </p:sp>
       <p:sp>
         <p:nvSpPr>
-          <p:cNvPr id="111" name="Google Shape;111;p4"/>
-          <p:cNvSpPr txBox="1">
-            <a:spLocks noGrp="1"/>
+          <p:cNvPr id="3" name="Text Placeholder 2">
+            <a:extLst>
+              <a:ext uri="{FF2B5EF4-FFF2-40B4-BE49-F238E27FC236}">
+                <a16:creationId xmlns:a16="http://schemas.microsoft.com/office/drawing/2014/main" id="{47BA04DF-CF8A-E607-A541-1EF5030F9A6A}"/>
+              </a:ext>
+            </a:extLst>
+          </p:cNvPr>
+          <p:cNvSpPr>
+            <a:spLocks noGrp="1" noChangeArrowheads="1"/>
           </p:cNvSpPr>
           <p:nvPr>
             <p:ph type="body" idx="1"/>
           </p:nvPr>
         </p:nvSpPr>
-        <p:spPr>
+        <p:spPr bwMode="auto">
           <a:xfrm>
-            <a:off x="472422" y="1343818"/>
-            <a:ext cx="10515600" cy="4777234"/>
+            <a:off x="793586" y="506116"/>
+            <a:ext cx="4974439" cy="6093976"/>
           </a:xfrm>
           <a:prstGeom prst="rect">
             <a:avLst/>
@@ -17616,67 +17540,454 @@
           <a:ln>
             <a:noFill/>
           </a:ln>
+          <a:effectLst/>
+          <a:extLst>
+            <a:ext uri="{909E8E84-426E-40DD-AFC4-6F175D3DCCD1}">
+              <a14:hiddenFill xmlns:a14="http://schemas.microsoft.com/office/drawing/2010/main">
+                <a:solidFill>
+                  <a:schemeClr val="accent1"/>
+                </a:solidFill>
+              </a14:hiddenFill>
+            </a:ext>
+            <a:ext uri="{91240B29-F687-4F45-9708-019B960494DF}">
+              <a14:hiddenLine xmlns:a14="http://schemas.microsoft.com/office/drawing/2010/main" w="9525">
+                <a:solidFill>
+                  <a:schemeClr val="tx1"/>
+                </a:solidFill>
+                <a:miter lim="800000"/>
+                <a:headEnd/>
+                <a:tailEnd/>
+              </a14:hiddenLine>
+            </a:ext>
+            <a:ext uri="{AF507438-7753-43E0-B8FC-AC1667EBCBE1}">
+              <a14:hiddenEffects xmlns:a14="http://schemas.microsoft.com/office/drawing/2010/main">
+                <a:effectLst>
+                  <a:outerShdw dist="35921" dir="2700000" algn="ctr" rotWithShape="0">
+                    <a:schemeClr val="bg2"/>
+                  </a:outerShdw>
+                </a:effectLst>
+              </a14:hiddenEffects>
+            </a:ext>
+          </a:extLst>
         </p:spPr>
         <p:txBody>
-          <a:bodyPr spcFirstLastPara="1" wrap="square" lIns="91425" tIns="45700" rIns="91425" bIns="45700" anchor="t" anchorCtr="0">
-            <a:normAutofit/>
+          <a:bodyPr vert="horz" wrap="none" lIns="91440" tIns="45720" rIns="91440" bIns="45720" numCol="1" anchor="ctr" anchorCtr="0" compatLnSpc="1">
+            <a:prstTxWarp prst="textNoShape">
+              <a:avLst/>
+            </a:prstTxWarp>
+            <a:spAutoFit/>
           </a:bodyPr>
           <a:lstStyle/>
           <a:p>
-            <a:r>
-              <a:rPr lang="en-US" sz="2400" b="1" dirty="0"/>
-              <a:t>Agenda</a:t>
-            </a:r>
-          </a:p>
-          <a:p>
-            <a:r>
-              <a:rPr lang="en-US" sz="2400" b="1" dirty="0"/>
-              <a:t>Objective of the Project</a:t>
-            </a:r>
-            <a:r>
-              <a:rPr lang="en-US" sz="2400" dirty="0"/>
-              <a:t> </a:t>
-            </a:r>
-          </a:p>
-          <a:p>
-            <a:r>
-              <a:rPr lang="en-US" sz="2400" b="1" dirty="0"/>
-              <a:t>Key Analysis Questions (Use Cases)</a:t>
-            </a:r>
-            <a:r>
-              <a:rPr lang="en-US" sz="2400" dirty="0"/>
-              <a:t> </a:t>
-            </a:r>
-          </a:p>
-          <a:p>
-            <a:r>
-              <a:rPr lang="en-US" sz="2400" b="1" dirty="0"/>
-              <a:t>Conclusion (Key Findings Overall)</a:t>
-            </a:r>
-            <a:r>
-              <a:rPr lang="en-US" sz="2400" dirty="0"/>
-              <a:t> </a:t>
-            </a:r>
-          </a:p>
-          <a:p>
-            <a:r>
-              <a:rPr lang="en-US" sz="2400" b="1" dirty="0"/>
-              <a:t>Q&amp;A</a:t>
-            </a:r>
-            <a:r>
-              <a:rPr lang="en-US" sz="2400" dirty="0"/>
-              <a:t> </a:t>
-            </a:r>
-          </a:p>
-          <a:p>
-            <a:r>
-              <a:rPr lang="en-US" sz="2400" b="1" dirty="0"/>
-              <a:t>My Experience / Challenges Working</a:t>
-            </a:r>
-            <a:endParaRPr lang="en-US" sz="2400" dirty="0"/>
+            <a:pPr marL="285750" indent="-285750" eaLnBrk="0" fontAlgn="base" hangingPunct="0">
+              <a:lnSpc>
+                <a:spcPct val="150000"/>
+              </a:lnSpc>
+              <a:spcBef>
+                <a:spcPct val="0"/>
+              </a:spcBef>
+              <a:spcAft>
+                <a:spcPct val="0"/>
+              </a:spcAft>
+              <a:buClrTx/>
+              <a:buSzTx/>
+            </a:pPr>
+            <a:endParaRPr kumimoji="0" lang="en-US" altLang="en-US" sz="2000" b="1" i="0" u="none" strike="noStrike" cap="none" normalizeH="0" baseline="0" dirty="0">
+              <a:ln>
+                <a:noFill/>
+              </a:ln>
+              <a:solidFill>
+                <a:schemeClr val="tx1"/>
+              </a:solidFill>
+              <a:effectLst/>
+              <a:latin typeface="Arial" panose="020B0604020202020204" pitchFamily="34" charset="0"/>
+            </a:endParaRPr>
+          </a:p>
+          <a:p>
+            <a:pPr marL="285750" indent="-285750" eaLnBrk="0" fontAlgn="base" hangingPunct="0">
+              <a:lnSpc>
+                <a:spcPct val="150000"/>
+              </a:lnSpc>
+              <a:spcBef>
+                <a:spcPct val="0"/>
+              </a:spcBef>
+              <a:spcAft>
+                <a:spcPct val="0"/>
+              </a:spcAft>
+              <a:buClrTx/>
+              <a:buSzTx/>
+            </a:pPr>
+            <a:r>
+              <a:rPr kumimoji="0" lang="en-US" altLang="en-US" sz="2000" b="1" i="0" u="none" strike="noStrike" cap="none" normalizeH="0" baseline="0" dirty="0">
+                <a:ln>
+                  <a:noFill/>
+                </a:ln>
+                <a:solidFill>
+                  <a:schemeClr val="tx1"/>
+                </a:solidFill>
+                <a:effectLst/>
+                <a:latin typeface="Arial" panose="020B0604020202020204" pitchFamily="34" charset="0"/>
+              </a:rPr>
+              <a:t>Introduction </a:t>
+            </a:r>
+          </a:p>
+          <a:p>
+            <a:pPr marL="285750" indent="-285750" eaLnBrk="0" fontAlgn="base" hangingPunct="0">
+              <a:lnSpc>
+                <a:spcPct val="150000"/>
+              </a:lnSpc>
+              <a:spcBef>
+                <a:spcPct val="0"/>
+              </a:spcBef>
+              <a:spcAft>
+                <a:spcPct val="0"/>
+              </a:spcAft>
+              <a:buClrTx/>
+              <a:buSzTx/>
+            </a:pPr>
+            <a:r>
+              <a:rPr kumimoji="0" lang="en-US" altLang="en-US" sz="2000" b="1" i="0" u="none" strike="noStrike" cap="none" normalizeH="0" baseline="0" dirty="0">
+                <a:ln>
+                  <a:noFill/>
+                </a:ln>
+                <a:solidFill>
+                  <a:schemeClr val="tx1"/>
+                </a:solidFill>
+                <a:effectLst/>
+                <a:latin typeface="Arial" panose="020B0604020202020204" pitchFamily="34" charset="0"/>
+              </a:rPr>
+              <a:t>Objective of the Project </a:t>
+            </a:r>
+          </a:p>
+          <a:p>
+            <a:pPr marL="285750" indent="-285750" eaLnBrk="0" fontAlgn="base" hangingPunct="0">
+              <a:lnSpc>
+                <a:spcPct val="150000"/>
+              </a:lnSpc>
+              <a:spcBef>
+                <a:spcPct val="0"/>
+              </a:spcBef>
+              <a:spcAft>
+                <a:spcPct val="0"/>
+              </a:spcAft>
+              <a:buClrTx/>
+              <a:buSzTx/>
+            </a:pPr>
+            <a:r>
+              <a:rPr kumimoji="0" lang="en-US" altLang="en-US" sz="2000" b="1" i="0" u="none" strike="noStrike" cap="none" normalizeH="0" baseline="0" dirty="0">
+                <a:ln>
+                  <a:noFill/>
+                </a:ln>
+                <a:solidFill>
+                  <a:schemeClr val="tx1"/>
+                </a:solidFill>
+                <a:effectLst/>
+                <a:latin typeface="Arial" panose="020B0604020202020204" pitchFamily="34" charset="0"/>
+              </a:rPr>
+              <a:t>Dataset Overview </a:t>
+            </a:r>
+          </a:p>
+          <a:p>
+            <a:pPr marL="285750" indent="-285750" eaLnBrk="0" fontAlgn="base" hangingPunct="0">
+              <a:lnSpc>
+                <a:spcPct val="150000"/>
+              </a:lnSpc>
+              <a:spcBef>
+                <a:spcPct val="0"/>
+              </a:spcBef>
+              <a:spcAft>
+                <a:spcPct val="0"/>
+              </a:spcAft>
+              <a:buClrTx/>
+              <a:buSzTx/>
+            </a:pPr>
+            <a:r>
+              <a:rPr kumimoji="0" lang="en-US" altLang="en-US" sz="2000" b="1" i="0" u="none" strike="noStrike" cap="none" normalizeH="0" baseline="0" dirty="0">
+                <a:ln>
+                  <a:noFill/>
+                </a:ln>
+                <a:solidFill>
+                  <a:schemeClr val="tx1"/>
+                </a:solidFill>
+                <a:effectLst/>
+                <a:latin typeface="Arial" panose="020B0604020202020204" pitchFamily="34" charset="0"/>
+              </a:rPr>
+              <a:t>Database Structure </a:t>
+            </a:r>
+          </a:p>
+          <a:p>
+            <a:pPr marL="285750" indent="-285750" eaLnBrk="0" fontAlgn="base" hangingPunct="0">
+              <a:lnSpc>
+                <a:spcPct val="150000"/>
+              </a:lnSpc>
+              <a:spcBef>
+                <a:spcPct val="0"/>
+              </a:spcBef>
+              <a:spcAft>
+                <a:spcPct val="0"/>
+              </a:spcAft>
+              <a:buClrTx/>
+              <a:buSzTx/>
+            </a:pPr>
+            <a:r>
+              <a:rPr kumimoji="0" lang="en-US" altLang="en-US" sz="2000" b="1" i="0" u="none" strike="noStrike" cap="none" normalizeH="0" baseline="0" dirty="0">
+                <a:ln>
+                  <a:noFill/>
+                </a:ln>
+                <a:solidFill>
+                  <a:schemeClr val="tx1"/>
+                </a:solidFill>
+                <a:effectLst/>
+                <a:latin typeface="Arial" panose="020B0604020202020204" pitchFamily="34" charset="0"/>
+              </a:rPr>
+              <a:t>SQL Concepts Used </a:t>
+            </a:r>
+          </a:p>
+          <a:p>
+            <a:pPr marL="285750" indent="-285750" eaLnBrk="0" fontAlgn="base" hangingPunct="0">
+              <a:lnSpc>
+                <a:spcPct val="150000"/>
+              </a:lnSpc>
+              <a:spcBef>
+                <a:spcPct val="0"/>
+              </a:spcBef>
+              <a:spcAft>
+                <a:spcPct val="0"/>
+              </a:spcAft>
+              <a:buClrTx/>
+              <a:buSzTx/>
+            </a:pPr>
+            <a:r>
+              <a:rPr kumimoji="0" lang="en-US" altLang="en-US" sz="2000" b="1" i="0" u="none" strike="noStrike" cap="none" normalizeH="0" baseline="0" dirty="0">
+                <a:ln>
+                  <a:noFill/>
+                </a:ln>
+                <a:solidFill>
+                  <a:schemeClr val="tx1"/>
+                </a:solidFill>
+                <a:effectLst/>
+                <a:latin typeface="Arial" panose="020B0604020202020204" pitchFamily="34" charset="0"/>
+              </a:rPr>
+              <a:t>Key Analysis Questions / Use Cases </a:t>
+            </a:r>
+          </a:p>
+          <a:p>
+            <a:pPr marL="285750" indent="-285750" eaLnBrk="0" fontAlgn="base" hangingPunct="0">
+              <a:lnSpc>
+                <a:spcPct val="150000"/>
+              </a:lnSpc>
+              <a:spcBef>
+                <a:spcPct val="0"/>
+              </a:spcBef>
+              <a:spcAft>
+                <a:spcPct val="0"/>
+              </a:spcAft>
+              <a:buClrTx/>
+              <a:buSzTx/>
+            </a:pPr>
+            <a:r>
+              <a:rPr kumimoji="0" lang="en-US" altLang="en-US" sz="2000" b="1" i="0" u="none" strike="noStrike" cap="none" normalizeH="0" baseline="0" dirty="0">
+                <a:ln>
+                  <a:noFill/>
+                </a:ln>
+                <a:solidFill>
+                  <a:schemeClr val="tx1"/>
+                </a:solidFill>
+                <a:effectLst/>
+                <a:latin typeface="Arial" panose="020B0604020202020204" pitchFamily="34" charset="0"/>
+              </a:rPr>
+              <a:t>Advanced SQL Analysis </a:t>
+            </a:r>
+          </a:p>
+          <a:p>
+            <a:pPr marL="285750" indent="-285750" eaLnBrk="0" fontAlgn="base" hangingPunct="0">
+              <a:lnSpc>
+                <a:spcPct val="150000"/>
+              </a:lnSpc>
+              <a:spcBef>
+                <a:spcPct val="0"/>
+              </a:spcBef>
+              <a:spcAft>
+                <a:spcPct val="0"/>
+              </a:spcAft>
+              <a:buClrTx/>
+              <a:buSzTx/>
+            </a:pPr>
+            <a:r>
+              <a:rPr kumimoji="0" lang="en-US" altLang="en-US" sz="2000" b="1" i="0" u="none" strike="noStrike" cap="none" normalizeH="0" baseline="0" dirty="0">
+                <a:ln>
+                  <a:noFill/>
+                </a:ln>
+                <a:solidFill>
+                  <a:schemeClr val="tx1"/>
+                </a:solidFill>
+                <a:effectLst/>
+                <a:latin typeface="Arial" panose="020B0604020202020204" pitchFamily="34" charset="0"/>
+              </a:rPr>
+              <a:t>Key Findings </a:t>
+            </a:r>
+          </a:p>
+          <a:p>
+            <a:pPr marL="285750" indent="-285750" eaLnBrk="0" fontAlgn="base" hangingPunct="0">
+              <a:lnSpc>
+                <a:spcPct val="150000"/>
+              </a:lnSpc>
+              <a:spcBef>
+                <a:spcPct val="0"/>
+              </a:spcBef>
+              <a:spcAft>
+                <a:spcPct val="0"/>
+              </a:spcAft>
+              <a:buClrTx/>
+              <a:buSzTx/>
+            </a:pPr>
+            <a:r>
+              <a:rPr kumimoji="0" lang="en-US" altLang="en-US" sz="2000" b="1" i="0" u="none" strike="noStrike" cap="none" normalizeH="0" baseline="0" dirty="0">
+                <a:ln>
+                  <a:noFill/>
+                </a:ln>
+                <a:solidFill>
+                  <a:schemeClr val="tx1"/>
+                </a:solidFill>
+                <a:effectLst/>
+                <a:latin typeface="Arial" panose="020B0604020202020204" pitchFamily="34" charset="0"/>
+              </a:rPr>
+              <a:t>My Experience / Challenges </a:t>
+            </a:r>
+          </a:p>
+          <a:p>
+            <a:pPr marL="285750" indent="-285750" eaLnBrk="0" fontAlgn="base" hangingPunct="0">
+              <a:lnSpc>
+                <a:spcPct val="150000"/>
+              </a:lnSpc>
+              <a:spcBef>
+                <a:spcPct val="0"/>
+              </a:spcBef>
+              <a:spcAft>
+                <a:spcPct val="0"/>
+              </a:spcAft>
+              <a:buClrTx/>
+              <a:buSzTx/>
+            </a:pPr>
+            <a:r>
+              <a:rPr kumimoji="0" lang="en-US" altLang="en-US" sz="2000" b="1" i="0" u="none" strike="noStrike" cap="none" normalizeH="0" baseline="0" dirty="0">
+                <a:ln>
+                  <a:noFill/>
+                </a:ln>
+                <a:solidFill>
+                  <a:schemeClr val="tx1"/>
+                </a:solidFill>
+                <a:effectLst/>
+                <a:latin typeface="Arial" panose="020B0604020202020204" pitchFamily="34" charset="0"/>
+              </a:rPr>
+              <a:t>Key Learnings </a:t>
+            </a:r>
+          </a:p>
+          <a:p>
+            <a:pPr marL="285750" indent="-285750" eaLnBrk="0" fontAlgn="base" hangingPunct="0">
+              <a:lnSpc>
+                <a:spcPct val="150000"/>
+              </a:lnSpc>
+              <a:spcBef>
+                <a:spcPct val="0"/>
+              </a:spcBef>
+              <a:spcAft>
+                <a:spcPct val="0"/>
+              </a:spcAft>
+              <a:buClrTx/>
+              <a:buSzTx/>
+            </a:pPr>
+            <a:r>
+              <a:rPr kumimoji="0" lang="en-US" altLang="en-US" sz="2000" b="1" i="0" u="none" strike="noStrike" cap="none" normalizeH="0" baseline="0" dirty="0">
+                <a:ln>
+                  <a:noFill/>
+                </a:ln>
+                <a:solidFill>
+                  <a:schemeClr val="tx1"/>
+                </a:solidFill>
+                <a:effectLst/>
+                <a:latin typeface="Arial" panose="020B0604020202020204" pitchFamily="34" charset="0"/>
+              </a:rPr>
+              <a:t>Conclusion </a:t>
+            </a:r>
+          </a:p>
+          <a:p>
+            <a:pPr marL="285750" indent="-285750" eaLnBrk="0" fontAlgn="base" hangingPunct="0">
+              <a:lnSpc>
+                <a:spcPct val="150000"/>
+              </a:lnSpc>
+              <a:spcBef>
+                <a:spcPct val="0"/>
+              </a:spcBef>
+              <a:spcAft>
+                <a:spcPct val="0"/>
+              </a:spcAft>
+              <a:buClrTx/>
+              <a:buSzTx/>
+            </a:pPr>
+            <a:r>
+              <a:rPr kumimoji="0" lang="en-US" altLang="en-US" sz="2000" b="1" i="0" u="none" strike="noStrike" cap="none" normalizeH="0" baseline="0" dirty="0">
+                <a:ln>
+                  <a:noFill/>
+                </a:ln>
+                <a:solidFill>
+                  <a:schemeClr val="tx1"/>
+                </a:solidFill>
+                <a:effectLst/>
+                <a:latin typeface="Arial" panose="020B0604020202020204" pitchFamily="34" charset="0"/>
+              </a:rPr>
+              <a:t>Q&amp;A </a:t>
+            </a:r>
           </a:p>
         </p:txBody>
       </p:sp>
+      <p:pic>
+        <p:nvPicPr>
+          <p:cNvPr id="4" name="Picture 6" descr="Agenda Stock Illustrations – 122,471 Agenda Stock ...">
+            <a:extLst>
+              <a:ext uri="{FF2B5EF4-FFF2-40B4-BE49-F238E27FC236}">
+                <a16:creationId xmlns:a16="http://schemas.microsoft.com/office/drawing/2014/main" id="{0FE84BE6-39A5-F48E-C8D7-38E38F8BBB87}"/>
+              </a:ext>
+            </a:extLst>
+          </p:cNvPr>
+          <p:cNvPicPr>
+            <a:picLocks noChangeAspect="1" noChangeArrowheads="1"/>
+          </p:cNvPicPr>
+          <p:nvPr/>
+        </p:nvPicPr>
+        <p:blipFill>
+          <a:blip r:embed="rId3">
+            <a:extLst>
+              <a:ext uri="{28A0092B-C50C-407E-A947-70E740481C1C}">
+                <a14:useLocalDpi xmlns:a14="http://schemas.microsoft.com/office/drawing/2010/main" val="0"/>
+              </a:ext>
+            </a:extLst>
+          </a:blip>
+          <a:srcRect/>
+          <a:stretch>
+            <a:fillRect/>
+          </a:stretch>
+        </p:blipFill>
+        <p:spPr bwMode="auto">
+          <a:xfrm>
+            <a:off x="6506001" y="829559"/>
+            <a:ext cx="4996206" cy="4996206"/>
+          </a:xfrm>
+          <a:prstGeom prst="rect">
+            <a:avLst/>
+          </a:prstGeom>
+          <a:noFill/>
+          <a:extLst>
+            <a:ext uri="{909E8E84-426E-40DD-AFC4-6F175D3DCCD1}">
+              <a14:hiddenFill xmlns:a14="http://schemas.microsoft.com/office/drawing/2010/main">
+                <a:solidFill>
+                  <a:srgbClr val="FFFFFF"/>
+                </a:solidFill>
+              </a14:hiddenFill>
+            </a:ext>
+          </a:extLst>
+        </p:spPr>
+      </p:pic>
     </p:spTree>
   </p:cSld>
   <p:clrMapOvr>
@@ -17686,6 +17997,211 @@
 </file>
 
 <file path=ppt/slides/slide4.xml><?xml version="1.0" encoding="utf-8"?>
+<p:sld xmlns:a="http://schemas.openxmlformats.org/drawingml/2006/main" xmlns:r="http://schemas.openxmlformats.org/officeDocument/2006/relationships" xmlns:p="http://schemas.openxmlformats.org/presentationml/2006/main">
+  <p:cSld>
+    <p:spTree>
+      <p:nvGrpSpPr>
+        <p:cNvPr id="1" name=""/>
+        <p:cNvGrpSpPr/>
+        <p:nvPr/>
+      </p:nvGrpSpPr>
+      <p:grpSpPr>
+        <a:xfrm>
+          <a:off x="0" y="0"/>
+          <a:ext cx="0" cy="0"/>
+          <a:chOff x="0" y="0"/>
+          <a:chExt cx="0" cy="0"/>
+        </a:xfrm>
+      </p:grpSpPr>
+      <p:sp>
+        <p:nvSpPr>
+          <p:cNvPr id="2" name="Title 1">
+            <a:extLst>
+              <a:ext uri="{FF2B5EF4-FFF2-40B4-BE49-F238E27FC236}">
+                <a16:creationId xmlns:a16="http://schemas.microsoft.com/office/drawing/2014/main" id="{A47B1EE7-05CB-3C34-D11E-38C41C91BE63}"/>
+              </a:ext>
+            </a:extLst>
+          </p:cNvPr>
+          <p:cNvSpPr>
+            <a:spLocks noGrp="1"/>
+          </p:cNvSpPr>
+          <p:nvPr>
+            <p:ph type="title"/>
+          </p:nvPr>
+        </p:nvSpPr>
+        <p:spPr>
+          <a:xfrm>
+            <a:off x="84055" y="197962"/>
+            <a:ext cx="10515600" cy="1325563"/>
+          </a:xfrm>
+        </p:spPr>
+        <p:txBody>
+          <a:bodyPr/>
+          <a:lstStyle/>
+          <a:p>
+            <a:r>
+              <a:rPr lang="en-US" b="1" dirty="0">
+                <a:solidFill>
+                  <a:srgbClr val="FF0000"/>
+                </a:solidFill>
+              </a:rPr>
+              <a:t>INTRODUCTION</a:t>
+            </a:r>
+          </a:p>
+        </p:txBody>
+      </p:sp>
+      <p:sp>
+        <p:nvSpPr>
+          <p:cNvPr id="4" name="Rectangle 1">
+            <a:extLst>
+              <a:ext uri="{FF2B5EF4-FFF2-40B4-BE49-F238E27FC236}">
+                <a16:creationId xmlns:a16="http://schemas.microsoft.com/office/drawing/2014/main" id="{B71FA6D8-67AF-55DA-4C66-3D02934E6A55}"/>
+              </a:ext>
+            </a:extLst>
+          </p:cNvPr>
+          <p:cNvSpPr>
+            <a:spLocks noGrp="1" noChangeArrowheads="1"/>
+          </p:cNvSpPr>
+          <p:nvPr>
+            <p:ph type="body" idx="1"/>
+          </p:nvPr>
+        </p:nvSpPr>
+        <p:spPr bwMode="auto">
+          <a:xfrm>
+            <a:off x="743933" y="1767006"/>
+            <a:ext cx="10370269" cy="3323987"/>
+          </a:xfrm>
+          <a:prstGeom prst="rect">
+            <a:avLst/>
+          </a:prstGeom>
+          <a:noFill/>
+          <a:ln>
+            <a:noFill/>
+          </a:ln>
+          <a:effectLst/>
+          <a:extLst>
+            <a:ext uri="{909E8E84-426E-40DD-AFC4-6F175D3DCCD1}">
+              <a14:hiddenFill xmlns:a14="http://schemas.microsoft.com/office/drawing/2010/main">
+                <a:solidFill>
+                  <a:schemeClr val="accent1"/>
+                </a:solidFill>
+              </a14:hiddenFill>
+            </a:ext>
+            <a:ext uri="{91240B29-F687-4F45-9708-019B960494DF}">
+              <a14:hiddenLine xmlns:a14="http://schemas.microsoft.com/office/drawing/2010/main" w="9525">
+                <a:solidFill>
+                  <a:schemeClr val="tx1"/>
+                </a:solidFill>
+                <a:miter lim="800000"/>
+                <a:headEnd/>
+                <a:tailEnd/>
+              </a14:hiddenLine>
+            </a:ext>
+            <a:ext uri="{AF507438-7753-43E0-B8FC-AC1667EBCBE1}">
+              <a14:hiddenEffects xmlns:a14="http://schemas.microsoft.com/office/drawing/2010/main">
+                <a:effectLst>
+                  <a:outerShdw dist="35921" dir="2700000" algn="ctr" rotWithShape="0">
+                    <a:schemeClr val="bg2"/>
+                  </a:outerShdw>
+                </a:effectLst>
+              </a14:hiddenEffects>
+            </a:ext>
+          </a:extLst>
+        </p:spPr>
+        <p:txBody>
+          <a:bodyPr vert="horz" wrap="square" lIns="91440" tIns="45720" rIns="91440" bIns="45720" numCol="1" anchor="ctr" anchorCtr="0" compatLnSpc="1">
+            <a:prstTxWarp prst="textNoShape">
+              <a:avLst/>
+            </a:prstTxWarp>
+            <a:spAutoFit/>
+          </a:bodyPr>
+          <a:lstStyle/>
+          <a:p>
+            <a:pPr marL="0" indent="0" eaLnBrk="0" fontAlgn="base" hangingPunct="0">
+              <a:lnSpc>
+                <a:spcPct val="150000"/>
+              </a:lnSpc>
+              <a:spcBef>
+                <a:spcPct val="0"/>
+              </a:spcBef>
+              <a:spcAft>
+                <a:spcPct val="0"/>
+              </a:spcAft>
+              <a:buClrTx/>
+              <a:buSzTx/>
+              <a:buNone/>
+            </a:pPr>
+            <a:r>
+              <a:rPr lang="en-US" sz="2000" dirty="0"/>
+              <a:t>This project focuses on analyzing </a:t>
+            </a:r>
+            <a:r>
+              <a:rPr lang="en-US" sz="2000" b="1" dirty="0"/>
+              <a:t>restaurant and consumer data using SQL</a:t>
+            </a:r>
+            <a:r>
+              <a:rPr lang="en-US" sz="2000" dirty="0"/>
+              <a:t>. The dataset contains information about consumers, their food preferences, restaurants, cuisines, and ratings. The data was organized into related tables using </a:t>
+            </a:r>
+            <a:r>
+              <a:rPr lang="en-US" sz="2000" b="1" dirty="0" err="1"/>
+              <a:t>Consumer_ID</a:t>
+            </a:r>
+            <a:r>
+              <a:rPr lang="en-US" sz="2000" b="1" dirty="0"/>
+              <a:t> and </a:t>
+            </a:r>
+            <a:r>
+              <a:rPr lang="en-US" sz="2000" b="1" dirty="0" err="1"/>
+              <a:t>Restaurant_ID</a:t>
+            </a:r>
+            <a:r>
+              <a:rPr lang="en-US" sz="2000" dirty="0"/>
+              <a:t>. The main purpose is to understand </a:t>
+            </a:r>
+            <a:r>
+              <a:rPr lang="en-US" sz="2000" b="1" dirty="0"/>
+              <a:t>consumer preferences, restaurant details, and rating patterns</a:t>
+            </a:r>
+            <a:r>
+              <a:rPr lang="en-US" sz="2000" dirty="0"/>
+              <a:t> through different SQL queries. This project also helped me gain practical experience in </a:t>
+            </a:r>
+            <a:r>
+              <a:rPr lang="en-US" sz="2000" b="1" dirty="0"/>
+              <a:t>SQL data analysis, problem solving, and working with multiple related tables</a:t>
+            </a:r>
+            <a:r>
+              <a:rPr lang="en-US" sz="2000" dirty="0"/>
+              <a:t>, while improving my understanding of databases and writing SQL queries for different analysis requirements.</a:t>
+            </a:r>
+            <a:endParaRPr kumimoji="0" lang="en-US" altLang="en-US" sz="2000" b="0" i="0" u="none" strike="noStrike" cap="none" normalizeH="0" baseline="0" dirty="0">
+              <a:ln>
+                <a:noFill/>
+              </a:ln>
+              <a:solidFill>
+                <a:schemeClr val="tx1"/>
+              </a:solidFill>
+              <a:effectLst/>
+              <a:latin typeface="+mj-lt"/>
+            </a:endParaRPr>
+          </a:p>
+        </p:txBody>
+      </p:sp>
+    </p:spTree>
+    <p:extLst>
+      <p:ext uri="{BB962C8B-B14F-4D97-AF65-F5344CB8AC3E}">
+        <p14:creationId xmlns:p14="http://schemas.microsoft.com/office/powerpoint/2010/main" val="3230667717"/>
+      </p:ext>
+    </p:extLst>
+  </p:cSld>
+  <p:clrMapOvr>
+    <a:masterClrMapping/>
+  </p:clrMapOvr>
+</p:sld>
+</file>
+
+<file path=ppt/slides/slide5.xml><?xml version="1.0" encoding="utf-8"?>
 <p:sld xmlns:a="http://schemas.openxmlformats.org/drawingml/2006/main" xmlns:r="http://schemas.openxmlformats.org/officeDocument/2006/relationships" xmlns:p="http://schemas.openxmlformats.org/presentationml/2006/main">
   <p:cSld>
     <p:spTree>
@@ -17757,8 +18273,8 @@
         </p:nvSpPr>
         <p:spPr>
           <a:xfrm>
-            <a:off x="493336" y="895111"/>
-            <a:ext cx="11698664" cy="5887475"/>
+            <a:off x="493336" y="1234477"/>
+            <a:ext cx="11698664" cy="5100336"/>
           </a:xfrm>
         </p:spPr>
         <p:txBody>
@@ -17771,167 +18287,73 @@
               <a:buNone/>
             </a:pPr>
             <a:r>
-              <a:rPr lang="en-US" sz="1600" b="1" dirty="0"/>
+              <a:rPr lang="en-US" sz="2000" b="1" dirty="0"/>
               <a:t>Main Objective</a:t>
             </a:r>
+            <a:endParaRPr lang="en-US" sz="2000" dirty="0"/>
+          </a:p>
+          <a:p>
+            <a:r>
+              <a:rPr lang="en-US" sz="2000" dirty="0"/>
+              <a:t>The main objective of this project is to use SQL to explore restaurant and consumer data and find useful information from it.</a:t>
+            </a:r>
           </a:p>
           <a:p>
             <a:pPr marL="114300" indent="0">
               <a:buNone/>
             </a:pPr>
             <a:r>
-              <a:rPr lang="en-US" sz="1600" dirty="0"/>
-              <a:t>Analyze restaurant and consumer data using SQL to find useful patterns and insights.</a:t>
-            </a:r>
-          </a:p>
-          <a:p>
-            <a:pPr marL="114300" indent="0">
-              <a:lnSpc>
-                <a:spcPct val="150000"/>
-              </a:lnSpc>
-              <a:buNone/>
-            </a:pPr>
-            <a:r>
-              <a:rPr lang="en-US" sz="1600" b="1" dirty="0"/>
-              <a:t>What We Have</a:t>
-            </a:r>
-          </a:p>
-          <a:p>
-            <a:r>
-              <a:rPr lang="en-US" sz="1600" dirty="0"/>
-              <a:t>5 database tables</a:t>
-            </a:r>
-          </a:p>
-          <a:p>
-            <a:r>
-              <a:rPr lang="en-US" sz="1600" dirty="0"/>
-              <a:t>70,000+ data records</a:t>
-            </a:r>
-          </a:p>
-          <a:p>
-            <a:r>
-              <a:rPr lang="en-US" sz="1600" dirty="0"/>
-              <a:t>Restaurants, Consumers, and Ratings data</a:t>
-            </a:r>
-          </a:p>
-          <a:p>
-            <a:pPr marL="114300" indent="0">
-              <a:lnSpc>
-                <a:spcPct val="150000"/>
-              </a:lnSpc>
-              <a:buNone/>
-            </a:pPr>
-            <a:r>
-              <a:rPr lang="en-US" sz="1600" b="1" dirty="0"/>
-              <a:t>What I Learned</a:t>
-            </a:r>
-          </a:p>
-          <a:p>
-            <a:r>
-              <a:rPr lang="en-US" sz="1600" dirty="0"/>
-              <a:t>Basic SQL: SELECT, WHERE, JOIN, GROUP BY</a:t>
-            </a:r>
-          </a:p>
-          <a:p>
-            <a:r>
-              <a:rPr lang="en-US" sz="1600" dirty="0"/>
-              <a:t>Advanced SQL: CTEs, Window Functions, Views, Stored Procedures</a:t>
-            </a:r>
-          </a:p>
-          <a:p>
-            <a:r>
-              <a:rPr lang="en-US" sz="1600" dirty="0"/>
-              <a:t>How to extract business insights from data</a:t>
-            </a:r>
-          </a:p>
-          <a:p>
-            <a:pPr marL="114300" indent="0">
-              <a:lnSpc>
-                <a:spcPct val="150000"/>
-              </a:lnSpc>
-              <a:buNone/>
-            </a:pPr>
-            <a:r>
-              <a:rPr lang="en-US" sz="1600" b="1" dirty="0"/>
-              <a:t>Queries Completed</a:t>
-            </a:r>
-          </a:p>
-          <a:p>
-            <a:r>
-              <a:rPr lang="en-US" sz="1600" dirty="0"/>
-              <a:t>Basic Filtering: 5 queries</a:t>
-            </a:r>
-          </a:p>
-          <a:p>
-            <a:r>
-              <a:rPr lang="en-US" sz="1600" dirty="0"/>
-              <a:t>JOINs &amp; Subqueries: 10 queries 		TOTAL: 32 SQL Queries</a:t>
-            </a:r>
-          </a:p>
-          <a:p>
-            <a:r>
-              <a:rPr lang="en-US" sz="1600" dirty="0"/>
-              <a:t>Aggregation: 5 queries</a:t>
-            </a:r>
-          </a:p>
-          <a:p>
-            <a:r>
-              <a:rPr lang="en-US" sz="1600" dirty="0"/>
-              <a:t>Advanced Topics: 12 queries 	</a:t>
-            </a:r>
-          </a:p>
-        </p:txBody>
-      </p:sp>
-      <p:sp>
-        <p:nvSpPr>
-          <p:cNvPr id="4" name="Right Brace 3">
-            <a:extLst>
-              <a:ext uri="{FF2B5EF4-FFF2-40B4-BE49-F238E27FC236}">
-                <a16:creationId xmlns:a16="http://schemas.microsoft.com/office/drawing/2014/main" id="{F5FAA56F-283F-F1F5-3C95-5B5A8F67A627}"/>
-              </a:ext>
-            </a:extLst>
-          </p:cNvPr>
-          <p:cNvSpPr/>
-          <p:nvPr/>
-        </p:nvSpPr>
-        <p:spPr>
-          <a:xfrm>
-            <a:off x="4289196" y="5020210"/>
-            <a:ext cx="669303" cy="1498861"/>
-          </a:xfrm>
-          <a:prstGeom prst="rightBrace">
-            <a:avLst/>
-          </a:prstGeom>
-        </p:spPr>
-        <p:style>
-          <a:lnRef idx="2">
-            <a:schemeClr val="dk1"/>
-          </a:lnRef>
-          <a:fillRef idx="0">
-            <a:schemeClr val="dk1"/>
-          </a:fillRef>
-          <a:effectRef idx="1">
-            <a:schemeClr val="dk1"/>
-          </a:effectRef>
-          <a:fontRef idx="minor">
-            <a:schemeClr val="tx1"/>
-          </a:fontRef>
-        </p:style>
-        <p:txBody>
-          <a:bodyPr rtlCol="0" anchor="ctr"/>
-          <a:lstStyle/>
-          <a:p>
-            <a:pPr algn="ctr"/>
-            <a:endParaRPr lang="en-US" b="1" dirty="0">
-              <a:ln w="0"/>
-              <a:effectLst>
-                <a:outerShdw blurRad="38100" dist="19050" dir="2700000" algn="tl" rotWithShape="0">
-                  <a:schemeClr val="dk1">
-                    <a:alpha val="40000"/>
-                  </a:schemeClr>
-                </a:outerShdw>
-              </a:effectLst>
-            </a:endParaRPr>
+              <a:rPr lang="en-US" sz="2000" b="1" dirty="0"/>
+              <a:t>Project Goals</a:t>
+            </a:r>
+          </a:p>
+          <a:p>
+            <a:r>
+              <a:rPr lang="en-US" sz="2000" dirty="0"/>
+              <a:t>Understand the structure of the given data. </a:t>
+            </a:r>
+          </a:p>
+          <a:p>
+            <a:r>
+              <a:rPr lang="en-US" sz="2000" dirty="0"/>
+              <a:t>Create relationships between different tables. </a:t>
+            </a:r>
+          </a:p>
+          <a:p>
+            <a:r>
+              <a:rPr lang="en-US" sz="2000" dirty="0"/>
+              <a:t>Analyze consumer information and food preferences. </a:t>
+            </a:r>
+          </a:p>
+          <a:p>
+            <a:r>
+              <a:rPr lang="en-US" sz="2000" dirty="0"/>
+              <a:t>Study restaurant details and available cuisines. </a:t>
+            </a:r>
+          </a:p>
+          <a:p>
+            <a:r>
+              <a:rPr lang="en-US" sz="2000" dirty="0"/>
+              <a:t>Analyze ratings given by consumers. </a:t>
+            </a:r>
+          </a:p>
+          <a:p>
+            <a:r>
+              <a:rPr lang="en-US" sz="2000" dirty="0"/>
+              <a:t>Use SQL to answer different analysis questions. </a:t>
+            </a:r>
+          </a:p>
+          <a:p>
+            <a:r>
+              <a:rPr lang="en-US" sz="2000" dirty="0"/>
+              <a:t>Practice both basic and advanced SQL concepts. </a:t>
+            </a:r>
+          </a:p>
+          <a:p>
+            <a:r>
+              <a:rPr lang="en-US" sz="2000" dirty="0"/>
+              <a:t>Improve my ability to solve data-related problems using SQL.</a:t>
+            </a:r>
           </a:p>
         </p:txBody>
       </p:sp>
@@ -17948,7 +18370,921 @@
 </p:sld>
 </file>
 
-<file path=ppt/slides/slide5.xml><?xml version="1.0" encoding="utf-8"?>
+<file path=ppt/slides/slide6.xml><?xml version="1.0" encoding="utf-8"?>
+<p:sld xmlns:a="http://schemas.openxmlformats.org/drawingml/2006/main" xmlns:r="http://schemas.openxmlformats.org/officeDocument/2006/relationships" xmlns:p="http://schemas.openxmlformats.org/presentationml/2006/main">
+  <p:cSld>
+    <p:spTree>
+      <p:nvGrpSpPr>
+        <p:cNvPr id="1" name=""/>
+        <p:cNvGrpSpPr/>
+        <p:nvPr/>
+      </p:nvGrpSpPr>
+      <p:grpSpPr>
+        <a:xfrm>
+          <a:off x="0" y="0"/>
+          <a:ext cx="0" cy="0"/>
+          <a:chOff x="0" y="0"/>
+          <a:chExt cx="0" cy="0"/>
+        </a:xfrm>
+      </p:grpSpPr>
+      <p:sp>
+        <p:nvSpPr>
+          <p:cNvPr id="2" name="Title 1">
+            <a:extLst>
+              <a:ext uri="{FF2B5EF4-FFF2-40B4-BE49-F238E27FC236}">
+                <a16:creationId xmlns:a16="http://schemas.microsoft.com/office/drawing/2014/main" id="{7EE46CF8-ACDC-62A7-8142-7859099D50E0}"/>
+              </a:ext>
+            </a:extLst>
+          </p:cNvPr>
+          <p:cNvSpPr>
+            <a:spLocks noGrp="1"/>
+          </p:cNvSpPr>
+          <p:nvPr>
+            <p:ph type="title"/>
+          </p:nvPr>
+        </p:nvSpPr>
+        <p:spPr>
+          <a:xfrm>
+            <a:off x="140617" y="498367"/>
+            <a:ext cx="10515600" cy="365339"/>
+          </a:xfrm>
+        </p:spPr>
+        <p:txBody>
+          <a:bodyPr>
+            <a:normAutofit fontScale="90000"/>
+          </a:bodyPr>
+          <a:lstStyle/>
+          <a:p>
+            <a:r>
+              <a:rPr lang="en-US" altLang="en-US" b="1" dirty="0">
+                <a:solidFill>
+                  <a:srgbClr val="FF0000"/>
+                </a:solidFill>
+                <a:latin typeface="Arial" panose="020B0604020202020204" pitchFamily="34" charset="0"/>
+              </a:rPr>
+              <a:t>DATASET OVERVIEW </a:t>
+            </a:r>
+            <a:br>
+              <a:rPr lang="en-US" altLang="en-US" b="1" dirty="0">
+                <a:solidFill>
+                  <a:srgbClr val="FF0000"/>
+                </a:solidFill>
+                <a:latin typeface="Arial" panose="020B0604020202020204" pitchFamily="34" charset="0"/>
+              </a:rPr>
+            </a:br>
+            <a:endParaRPr lang="en-US" dirty="0">
+              <a:solidFill>
+                <a:srgbClr val="FF0000"/>
+              </a:solidFill>
+            </a:endParaRPr>
+          </a:p>
+        </p:txBody>
+      </p:sp>
+      <p:sp>
+        <p:nvSpPr>
+          <p:cNvPr id="3" name="Text Placeholder 2">
+            <a:extLst>
+              <a:ext uri="{FF2B5EF4-FFF2-40B4-BE49-F238E27FC236}">
+                <a16:creationId xmlns:a16="http://schemas.microsoft.com/office/drawing/2014/main" id="{2D3E8973-D80C-68CF-3DC6-BE9488C60929}"/>
+              </a:ext>
+            </a:extLst>
+          </p:cNvPr>
+          <p:cNvSpPr>
+            <a:spLocks noGrp="1"/>
+          </p:cNvSpPr>
+          <p:nvPr>
+            <p:ph type="body" idx="1"/>
+          </p:nvPr>
+        </p:nvSpPr>
+        <p:spPr>
+          <a:xfrm>
+            <a:off x="404567" y="863705"/>
+            <a:ext cx="10515600" cy="5810471"/>
+          </a:xfrm>
+        </p:spPr>
+        <p:txBody>
+          <a:bodyPr>
+            <a:noAutofit/>
+          </a:bodyPr>
+          <a:lstStyle/>
+          <a:p>
+            <a:pPr>
+              <a:lnSpc>
+                <a:spcPct val="120000"/>
+              </a:lnSpc>
+            </a:pPr>
+            <a:r>
+              <a:rPr lang="en-US" sz="2000" dirty="0"/>
+              <a:t>The project data is divided into </a:t>
+            </a:r>
+            <a:r>
+              <a:rPr lang="en-US" sz="2000" b="1" dirty="0"/>
+              <a:t>five files</a:t>
+            </a:r>
+            <a:r>
+              <a:rPr lang="en-US" sz="2000" dirty="0"/>
+              <a:t>, and each file provides a different part of the restaurant and consumer information.</a:t>
+            </a:r>
+          </a:p>
+          <a:p>
+            <a:pPr>
+              <a:lnSpc>
+                <a:spcPct val="120000"/>
+              </a:lnSpc>
+            </a:pPr>
+            <a:r>
+              <a:rPr lang="en-US" sz="2000" b="1" dirty="0"/>
+              <a:t>Consumers:</a:t>
+            </a:r>
+            <a:r>
+              <a:rPr lang="en-US" sz="2000" dirty="0"/>
+              <a:t> This file contains consumer details such as </a:t>
+            </a:r>
+            <a:r>
+              <a:rPr lang="en-US" sz="2000" b="1" dirty="0"/>
+              <a:t>Consumer ID, city, location, age, occupation, marital status, children, smoking status, transportation method, and budget</a:t>
+            </a:r>
+            <a:r>
+              <a:rPr lang="en-US" sz="2000" dirty="0"/>
+              <a:t>.</a:t>
+            </a:r>
+          </a:p>
+          <a:p>
+            <a:pPr>
+              <a:lnSpc>
+                <a:spcPct val="120000"/>
+              </a:lnSpc>
+            </a:pPr>
+            <a:r>
+              <a:rPr lang="en-US" sz="2000" b="1" dirty="0"/>
+              <a:t>Consumer Preferences:</a:t>
+            </a:r>
+            <a:r>
+              <a:rPr lang="en-US" sz="2000" dirty="0"/>
+              <a:t> This file connects consumers with their </a:t>
+            </a:r>
+            <a:r>
+              <a:rPr lang="en-US" sz="2000" b="1" dirty="0"/>
+              <a:t>preferred cuisines</a:t>
+            </a:r>
+            <a:r>
+              <a:rPr lang="en-US" sz="2000" dirty="0"/>
+              <a:t>. It contains the </a:t>
+            </a:r>
+            <a:r>
+              <a:rPr lang="en-US" sz="2000" b="1" dirty="0"/>
+              <a:t>Consumer ID and Preferred Cuisine</a:t>
+            </a:r>
+            <a:r>
+              <a:rPr lang="en-US" sz="2000" dirty="0"/>
+              <a:t>, showing the types of food each consumer likes.</a:t>
+            </a:r>
+          </a:p>
+          <a:p>
+            <a:pPr>
+              <a:lnSpc>
+                <a:spcPct val="120000"/>
+              </a:lnSpc>
+            </a:pPr>
+            <a:r>
+              <a:rPr lang="en-US" sz="2000" b="1" dirty="0"/>
+              <a:t>Restaurants:</a:t>
+            </a:r>
+            <a:r>
+              <a:rPr lang="en-US" sz="2000" dirty="0"/>
+              <a:t> This file contains information about restaurants, including </a:t>
+            </a:r>
+            <a:r>
+              <a:rPr lang="en-US" sz="2000" b="1" dirty="0"/>
+              <a:t>Restaurant ID, restaurant name, location, price, alcohol service, smoking allowed, franchise status, area, and parking</a:t>
+            </a:r>
+            <a:r>
+              <a:rPr lang="en-US" sz="2000" dirty="0"/>
+              <a:t>.</a:t>
+            </a:r>
+          </a:p>
+          <a:p>
+            <a:pPr>
+              <a:lnSpc>
+                <a:spcPct val="120000"/>
+              </a:lnSpc>
+            </a:pPr>
+            <a:r>
+              <a:rPr lang="en-US" sz="2000" b="1" dirty="0"/>
+              <a:t>Restaurant Cuisines:</a:t>
+            </a:r>
+            <a:r>
+              <a:rPr lang="en-US" sz="2000" dirty="0"/>
+              <a:t> This file connects restaurants with the </a:t>
+            </a:r>
+            <a:r>
+              <a:rPr lang="en-US" sz="2000" b="1" dirty="0"/>
+              <a:t>cuisines they serve</a:t>
+            </a:r>
+            <a:r>
+              <a:rPr lang="en-US" sz="2000" dirty="0"/>
+              <a:t>. It contains the </a:t>
+            </a:r>
+            <a:r>
+              <a:rPr lang="en-US" sz="2000" b="1" dirty="0"/>
+              <a:t>Restaurant ID and Cuisine</a:t>
+            </a:r>
+            <a:r>
+              <a:rPr lang="en-US" sz="2000" dirty="0"/>
+              <a:t>, showing the different food types available at each restaurant.</a:t>
+            </a:r>
+          </a:p>
+          <a:p>
+            <a:pPr>
+              <a:lnSpc>
+                <a:spcPct val="120000"/>
+              </a:lnSpc>
+            </a:pPr>
+            <a:r>
+              <a:rPr lang="en-US" sz="2000" b="1" dirty="0"/>
+              <a:t>Ratings:</a:t>
+            </a:r>
+            <a:r>
+              <a:rPr lang="en-US" sz="2000" dirty="0"/>
+              <a:t> This file records the ratings given by consumers to restaurants. It contains </a:t>
+            </a:r>
+            <a:r>
+              <a:rPr lang="en-US" sz="2000" b="1" dirty="0"/>
+              <a:t>Consumer ID, Restaurant ID, Overall Rating, Food Rating, and Service Rating</a:t>
+            </a:r>
+            <a:r>
+              <a:rPr lang="en-US" sz="2000" dirty="0"/>
+              <a:t>.</a:t>
+            </a:r>
+          </a:p>
+          <a:p>
+            <a:pPr>
+              <a:lnSpc>
+                <a:spcPct val="120000"/>
+              </a:lnSpc>
+            </a:pPr>
+            <a:endParaRPr lang="en-US" sz="2000" dirty="0"/>
+          </a:p>
+        </p:txBody>
+      </p:sp>
+    </p:spTree>
+    <p:extLst>
+      <p:ext uri="{BB962C8B-B14F-4D97-AF65-F5344CB8AC3E}">
+        <p14:creationId xmlns:p14="http://schemas.microsoft.com/office/powerpoint/2010/main" val="2026286310"/>
+      </p:ext>
+    </p:extLst>
+  </p:cSld>
+  <p:clrMapOvr>
+    <a:masterClrMapping/>
+  </p:clrMapOvr>
+</p:sld>
+</file>
+
+<file path=ppt/slides/slide7.xml><?xml version="1.0" encoding="utf-8"?>
+<p:sld xmlns:a="http://schemas.openxmlformats.org/drawingml/2006/main" xmlns:r="http://schemas.openxmlformats.org/officeDocument/2006/relationships" xmlns:p="http://schemas.openxmlformats.org/presentationml/2006/main">
+  <p:cSld>
+    <p:spTree>
+      <p:nvGrpSpPr>
+        <p:cNvPr id="1" name=""/>
+        <p:cNvGrpSpPr/>
+        <p:nvPr/>
+      </p:nvGrpSpPr>
+      <p:grpSpPr>
+        <a:xfrm>
+          <a:off x="0" y="0"/>
+          <a:ext cx="0" cy="0"/>
+          <a:chOff x="0" y="0"/>
+          <a:chExt cx="0" cy="0"/>
+        </a:xfrm>
+      </p:grpSpPr>
+      <p:sp>
+        <p:nvSpPr>
+          <p:cNvPr id="2" name="Title 1">
+            <a:extLst>
+              <a:ext uri="{FF2B5EF4-FFF2-40B4-BE49-F238E27FC236}">
+                <a16:creationId xmlns:a16="http://schemas.microsoft.com/office/drawing/2014/main" id="{CB159E01-0B38-6D7E-D0A0-EDCC8965DA75}"/>
+              </a:ext>
+            </a:extLst>
+          </p:cNvPr>
+          <p:cNvSpPr>
+            <a:spLocks noGrp="1"/>
+          </p:cNvSpPr>
+          <p:nvPr>
+            <p:ph type="title"/>
+          </p:nvPr>
+        </p:nvSpPr>
+        <p:spPr>
+          <a:xfrm>
+            <a:off x="0" y="72895"/>
+            <a:ext cx="10515600" cy="794372"/>
+          </a:xfrm>
+        </p:spPr>
+        <p:txBody>
+          <a:bodyPr>
+            <a:normAutofit fontScale="90000"/>
+          </a:bodyPr>
+          <a:lstStyle/>
+          <a:p>
+            <a:pPr marL="285750" indent="-285750" eaLnBrk="0" fontAlgn="base" hangingPunct="0">
+              <a:lnSpc>
+                <a:spcPct val="150000"/>
+              </a:lnSpc>
+              <a:spcBef>
+                <a:spcPct val="0"/>
+              </a:spcBef>
+              <a:spcAft>
+                <a:spcPct val="0"/>
+              </a:spcAft>
+              <a:buClrTx/>
+              <a:buSzTx/>
+            </a:pPr>
+            <a:r>
+              <a:rPr lang="en-US" altLang="en-US" b="1" dirty="0">
+                <a:solidFill>
+                  <a:srgbClr val="FF0000"/>
+                </a:solidFill>
+                <a:latin typeface="Arial" panose="020B0604020202020204" pitchFamily="34" charset="0"/>
+              </a:rPr>
+              <a:t>DATABASE STRUCTURE </a:t>
+            </a:r>
+          </a:p>
+        </p:txBody>
+      </p:sp>
+      <p:sp>
+        <p:nvSpPr>
+          <p:cNvPr id="3" name="Text Placeholder 2">
+            <a:extLst>
+              <a:ext uri="{FF2B5EF4-FFF2-40B4-BE49-F238E27FC236}">
+                <a16:creationId xmlns:a16="http://schemas.microsoft.com/office/drawing/2014/main" id="{02D67F6F-05F4-9DD7-10F6-4665E78AB0B1}"/>
+              </a:ext>
+            </a:extLst>
+          </p:cNvPr>
+          <p:cNvSpPr>
+            <a:spLocks noGrp="1"/>
+          </p:cNvSpPr>
+          <p:nvPr>
+            <p:ph type="body" idx="1"/>
+          </p:nvPr>
+        </p:nvSpPr>
+        <p:spPr>
+          <a:xfrm>
+            <a:off x="338578" y="741543"/>
+            <a:ext cx="6467574" cy="4959480"/>
+          </a:xfrm>
+        </p:spPr>
+        <p:txBody>
+          <a:bodyPr>
+            <a:noAutofit/>
+          </a:bodyPr>
+          <a:lstStyle/>
+          <a:p>
+            <a:pPr marL="114300" indent="0">
+              <a:lnSpc>
+                <a:spcPct val="100000"/>
+              </a:lnSpc>
+              <a:buNone/>
+            </a:pPr>
+            <a:r>
+              <a:rPr lang="en-US" sz="2000" dirty="0"/>
+              <a:t>he project contains multiple tables that are connected through common IDs.</a:t>
+            </a:r>
+          </a:p>
+          <a:p>
+            <a:pPr marL="114300" indent="0">
+              <a:lnSpc>
+                <a:spcPct val="100000"/>
+              </a:lnSpc>
+              <a:buNone/>
+            </a:pPr>
+            <a:r>
+              <a:rPr lang="en-US" sz="2000" b="1" dirty="0"/>
+              <a:t>Main Connections</a:t>
+            </a:r>
+          </a:p>
+          <a:p>
+            <a:pPr>
+              <a:lnSpc>
+                <a:spcPct val="100000"/>
+              </a:lnSpc>
+            </a:pPr>
+            <a:r>
+              <a:rPr lang="en-US" sz="2000" b="1" dirty="0"/>
+              <a:t>Consumers</a:t>
+            </a:r>
+            <a:br>
+              <a:rPr lang="en-US" sz="2000" dirty="0"/>
+            </a:br>
+            <a:r>
+              <a:rPr lang="en-US" sz="2000" dirty="0"/>
+              <a:t>→ </a:t>
+            </a:r>
+            <a:r>
+              <a:rPr lang="en-US" sz="2000" dirty="0" err="1"/>
+              <a:t>Consumer_ID</a:t>
+            </a:r>
+            <a:r>
+              <a:rPr lang="en-US" sz="2000" dirty="0"/>
+              <a:t> → Consumer Preferences→ Ratings</a:t>
+            </a:r>
+          </a:p>
+          <a:p>
+            <a:pPr>
+              <a:lnSpc>
+                <a:spcPct val="100000"/>
+              </a:lnSpc>
+            </a:pPr>
+            <a:r>
+              <a:rPr lang="en-US" sz="2000" b="1" dirty="0"/>
+              <a:t>Restaurants</a:t>
+            </a:r>
+            <a:br>
+              <a:rPr lang="en-US" sz="2000" dirty="0"/>
+            </a:br>
+            <a:r>
+              <a:rPr lang="en-US" sz="2000" dirty="0"/>
+              <a:t>→ </a:t>
+            </a:r>
+            <a:r>
+              <a:rPr lang="en-US" sz="2000" dirty="0" err="1"/>
+              <a:t>Restaurant_ID</a:t>
+            </a:r>
+            <a:r>
+              <a:rPr lang="en-US" sz="2000" dirty="0"/>
+              <a:t> → Restaurant Cuisines→ Ratings</a:t>
+            </a:r>
+          </a:p>
+          <a:p>
+            <a:pPr marL="114300" indent="0">
+              <a:lnSpc>
+                <a:spcPct val="100000"/>
+              </a:lnSpc>
+              <a:buNone/>
+            </a:pPr>
+            <a:r>
+              <a:rPr lang="en-US" sz="2000" b="1" dirty="0"/>
+              <a:t>Important Relationships</a:t>
+            </a:r>
+          </a:p>
+          <a:p>
+            <a:pPr>
+              <a:lnSpc>
+                <a:spcPct val="100000"/>
+              </a:lnSpc>
+            </a:pPr>
+            <a:r>
+              <a:rPr lang="en-US" sz="2000" dirty="0" err="1"/>
+              <a:t>Consumer_ID</a:t>
+            </a:r>
+            <a:r>
+              <a:rPr lang="en-US" sz="2000" dirty="0"/>
+              <a:t> connects consumer details with preferences. </a:t>
+            </a:r>
+          </a:p>
+          <a:p>
+            <a:pPr>
+              <a:lnSpc>
+                <a:spcPct val="100000"/>
+              </a:lnSpc>
+            </a:pPr>
+            <a:r>
+              <a:rPr lang="en-US" sz="2000" dirty="0" err="1"/>
+              <a:t>Consumer_ID</a:t>
+            </a:r>
+            <a:r>
+              <a:rPr lang="en-US" sz="2000" dirty="0"/>
+              <a:t> also connects consumers with their ratings. </a:t>
+            </a:r>
+          </a:p>
+          <a:p>
+            <a:pPr>
+              <a:lnSpc>
+                <a:spcPct val="100000"/>
+              </a:lnSpc>
+            </a:pPr>
+            <a:r>
+              <a:rPr lang="en-US" sz="2000" dirty="0" err="1"/>
+              <a:t>Restaurant_ID</a:t>
+            </a:r>
+            <a:r>
+              <a:rPr lang="en-US" sz="2000" dirty="0"/>
+              <a:t> connects restaurant details with cuisines. </a:t>
+            </a:r>
+          </a:p>
+          <a:p>
+            <a:pPr>
+              <a:lnSpc>
+                <a:spcPct val="100000"/>
+              </a:lnSpc>
+            </a:pPr>
+            <a:r>
+              <a:rPr lang="en-US" sz="2000" dirty="0" err="1"/>
+              <a:t>Restaurant_ID</a:t>
+            </a:r>
+            <a:r>
+              <a:rPr lang="en-US" sz="2000" dirty="0"/>
+              <a:t> also connects restaurants with their ratings. </a:t>
+            </a:r>
+          </a:p>
+        </p:txBody>
+      </p:sp>
+      <p:pic>
+        <p:nvPicPr>
+          <p:cNvPr id="5" name="Picture 4">
+            <a:extLst>
+              <a:ext uri="{FF2B5EF4-FFF2-40B4-BE49-F238E27FC236}">
+                <a16:creationId xmlns:a16="http://schemas.microsoft.com/office/drawing/2014/main" id="{DFA70574-4397-24AE-AAAA-9E6724C2897C}"/>
+              </a:ext>
+            </a:extLst>
+          </p:cNvPr>
+          <p:cNvPicPr>
+            <a:picLocks noChangeAspect="1"/>
+          </p:cNvPicPr>
+          <p:nvPr/>
+        </p:nvPicPr>
+        <p:blipFill>
+          <a:blip r:embed="rId2"/>
+          <a:stretch>
+            <a:fillRect/>
+          </a:stretch>
+        </p:blipFill>
+        <p:spPr>
+          <a:xfrm>
+            <a:off x="6702456" y="160299"/>
+            <a:ext cx="5489543" cy="6051965"/>
+          </a:xfrm>
+          <a:prstGeom prst="rect">
+            <a:avLst/>
+          </a:prstGeom>
+        </p:spPr>
+      </p:pic>
+    </p:spTree>
+    <p:extLst>
+      <p:ext uri="{BB962C8B-B14F-4D97-AF65-F5344CB8AC3E}">
+        <p14:creationId xmlns:p14="http://schemas.microsoft.com/office/powerpoint/2010/main" val="3487134605"/>
+      </p:ext>
+    </p:extLst>
+  </p:cSld>
+  <p:clrMapOvr>
+    <a:masterClrMapping/>
+  </p:clrMapOvr>
+</p:sld>
+</file>
+
+<file path=ppt/slides/slide8.xml><?xml version="1.0" encoding="utf-8"?>
+<p:sld xmlns:a="http://schemas.openxmlformats.org/drawingml/2006/main" xmlns:r="http://schemas.openxmlformats.org/officeDocument/2006/relationships" xmlns:p="http://schemas.openxmlformats.org/presentationml/2006/main">
+  <p:cSld>
+    <p:spTree>
+      <p:nvGrpSpPr>
+        <p:cNvPr id="1" name=""/>
+        <p:cNvGrpSpPr/>
+        <p:nvPr/>
+      </p:nvGrpSpPr>
+      <p:grpSpPr>
+        <a:xfrm>
+          <a:off x="0" y="0"/>
+          <a:ext cx="0" cy="0"/>
+          <a:chOff x="0" y="0"/>
+          <a:chExt cx="0" cy="0"/>
+        </a:xfrm>
+      </p:grpSpPr>
+      <p:sp>
+        <p:nvSpPr>
+          <p:cNvPr id="2" name="Title 1">
+            <a:extLst>
+              <a:ext uri="{FF2B5EF4-FFF2-40B4-BE49-F238E27FC236}">
+                <a16:creationId xmlns:a16="http://schemas.microsoft.com/office/drawing/2014/main" id="{B1689F01-39C0-35B9-3137-16CDB1EF6281}"/>
+              </a:ext>
+            </a:extLst>
+          </p:cNvPr>
+          <p:cNvSpPr>
+            <a:spLocks noGrp="1"/>
+          </p:cNvSpPr>
+          <p:nvPr>
+            <p:ph type="title"/>
+          </p:nvPr>
+        </p:nvSpPr>
+        <p:spPr>
+          <a:xfrm>
+            <a:off x="395140" y="18255"/>
+            <a:ext cx="10515600" cy="1325563"/>
+          </a:xfrm>
+        </p:spPr>
+        <p:txBody>
+          <a:bodyPr/>
+          <a:lstStyle/>
+          <a:p>
+            <a:r>
+              <a:rPr lang="en-US" b="1" dirty="0">
+                <a:solidFill>
+                  <a:srgbClr val="FF0000"/>
+                </a:solidFill>
+              </a:rPr>
+              <a:t>SQL ANALYSIS &amp; CONCEPTS USED</a:t>
+            </a:r>
+          </a:p>
+        </p:txBody>
+      </p:sp>
+      <p:sp>
+        <p:nvSpPr>
+          <p:cNvPr id="3" name="Text Placeholder 2">
+            <a:extLst>
+              <a:ext uri="{FF2B5EF4-FFF2-40B4-BE49-F238E27FC236}">
+                <a16:creationId xmlns:a16="http://schemas.microsoft.com/office/drawing/2014/main" id="{E2F2697D-D078-3C09-0FCC-8EC9721289D0}"/>
+              </a:ext>
+            </a:extLst>
+          </p:cNvPr>
+          <p:cNvSpPr>
+            <a:spLocks noGrp="1"/>
+          </p:cNvSpPr>
+          <p:nvPr>
+            <p:ph type="body" idx="1"/>
+          </p:nvPr>
+        </p:nvSpPr>
+        <p:spPr>
+          <a:xfrm>
+            <a:off x="847627" y="1052626"/>
+            <a:ext cx="4959284" cy="5376453"/>
+          </a:xfrm>
+        </p:spPr>
+        <p:txBody>
+          <a:bodyPr>
+            <a:noAutofit/>
+          </a:bodyPr>
+          <a:lstStyle/>
+          <a:p>
+            <a:pPr marL="114300" indent="0">
+              <a:buNone/>
+            </a:pPr>
+            <a:r>
+              <a:rPr lang="en-US" sz="2000" b="1" dirty="0"/>
+              <a:t>SQL Concepts Used</a:t>
+            </a:r>
+          </a:p>
+          <a:p>
+            <a:pPr marL="114300" indent="0">
+              <a:buNone/>
+            </a:pPr>
+            <a:r>
+              <a:rPr lang="en-US" sz="2000" b="1" dirty="0"/>
+              <a:t>Basic SQL</a:t>
+            </a:r>
+          </a:p>
+          <a:p>
+            <a:r>
+              <a:rPr lang="en-US" sz="2000" dirty="0"/>
+              <a:t>SELECT </a:t>
+            </a:r>
+          </a:p>
+          <a:p>
+            <a:r>
+              <a:rPr lang="en-US" sz="2000" dirty="0"/>
+              <a:t>WHERE </a:t>
+            </a:r>
+          </a:p>
+          <a:p>
+            <a:r>
+              <a:rPr lang="en-US" sz="2000" dirty="0"/>
+              <a:t>ORDER BY </a:t>
+            </a:r>
+          </a:p>
+          <a:p>
+            <a:r>
+              <a:rPr lang="en-US" sz="2000" dirty="0"/>
+              <a:t>GROUP BY </a:t>
+            </a:r>
+          </a:p>
+          <a:p>
+            <a:r>
+              <a:rPr lang="en-US" sz="2000" dirty="0"/>
+              <a:t>HAVING </a:t>
+            </a:r>
+          </a:p>
+          <a:p>
+            <a:pPr marL="114300" indent="0">
+              <a:buNone/>
+            </a:pPr>
+            <a:r>
+              <a:rPr lang="en-US" sz="2000" b="1" dirty="0"/>
+              <a:t>JOINs &amp; Subqueries</a:t>
+            </a:r>
+          </a:p>
+          <a:p>
+            <a:r>
+              <a:rPr lang="en-US" sz="2000" dirty="0"/>
+              <a:t>INNER JOIN ,LEFT JOIN,RIGHT JOIN </a:t>
+            </a:r>
+          </a:p>
+          <a:p>
+            <a:r>
+              <a:rPr lang="en-US" sz="2000" dirty="0"/>
+              <a:t>Subqueries </a:t>
+            </a:r>
+          </a:p>
+          <a:p>
+            <a:r>
+              <a:rPr lang="en-US" sz="2000" dirty="0"/>
+              <a:t>IN </a:t>
+            </a:r>
+          </a:p>
+          <a:p>
+            <a:r>
+              <a:rPr lang="en-US" sz="2000" dirty="0"/>
+              <a:t>NOT IN </a:t>
+            </a:r>
+          </a:p>
+          <a:p>
+            <a:r>
+              <a:rPr lang="en-US" sz="2000" dirty="0"/>
+              <a:t>EXISTS </a:t>
+            </a:r>
+          </a:p>
+          <a:p>
+            <a:endParaRPr lang="en-US" sz="2000" dirty="0"/>
+          </a:p>
+        </p:txBody>
+      </p:sp>
+      <p:sp>
+        <p:nvSpPr>
+          <p:cNvPr id="5" name="TextBox 4">
+            <a:extLst>
+              <a:ext uri="{FF2B5EF4-FFF2-40B4-BE49-F238E27FC236}">
+                <a16:creationId xmlns:a16="http://schemas.microsoft.com/office/drawing/2014/main" id="{B8C33995-B0BC-3DE9-E2AD-2DDC1792FAC2}"/>
+              </a:ext>
+            </a:extLst>
+          </p:cNvPr>
+          <p:cNvSpPr txBox="1"/>
+          <p:nvPr/>
+        </p:nvSpPr>
+        <p:spPr>
+          <a:xfrm>
+            <a:off x="6746450" y="1052626"/>
+            <a:ext cx="6094428" cy="5113644"/>
+          </a:xfrm>
+          <a:prstGeom prst="rect">
+            <a:avLst/>
+          </a:prstGeom>
+          <a:noFill/>
+        </p:spPr>
+        <p:txBody>
+          <a:bodyPr wrap="square">
+            <a:spAutoFit/>
+          </a:bodyPr>
+          <a:lstStyle/>
+          <a:p>
+            <a:pPr>
+              <a:lnSpc>
+                <a:spcPct val="150000"/>
+              </a:lnSpc>
+            </a:pPr>
+            <a:r>
+              <a:rPr lang="en-US" sz="2000" b="1" dirty="0"/>
+              <a:t>Advanced SQL</a:t>
+            </a:r>
+          </a:p>
+          <a:p>
+            <a:pPr marL="285750" indent="-285750">
+              <a:lnSpc>
+                <a:spcPct val="150000"/>
+              </a:lnSpc>
+              <a:buFont typeface="Arial" panose="020B0604020202020204" pitchFamily="34" charset="0"/>
+              <a:buChar char="•"/>
+            </a:pPr>
+            <a:r>
+              <a:rPr lang="en-US" sz="2000" dirty="0"/>
+              <a:t>CTEs </a:t>
+            </a:r>
+          </a:p>
+          <a:p>
+            <a:pPr marL="285750" indent="-285750">
+              <a:lnSpc>
+                <a:spcPct val="150000"/>
+              </a:lnSpc>
+              <a:buFont typeface="Arial" panose="020B0604020202020204" pitchFamily="34" charset="0"/>
+              <a:buChar char="•"/>
+            </a:pPr>
+            <a:r>
+              <a:rPr lang="en-US" sz="2000" dirty="0"/>
+              <a:t>Window Functions </a:t>
+            </a:r>
+          </a:p>
+          <a:p>
+            <a:pPr marL="285750" indent="-285750">
+              <a:lnSpc>
+                <a:spcPct val="150000"/>
+              </a:lnSpc>
+              <a:buFont typeface="Arial" panose="020B0604020202020204" pitchFamily="34" charset="0"/>
+              <a:buChar char="•"/>
+            </a:pPr>
+            <a:r>
+              <a:rPr lang="en-US" sz="2000" dirty="0"/>
+              <a:t>Views </a:t>
+            </a:r>
+          </a:p>
+          <a:p>
+            <a:pPr marL="285750" indent="-285750">
+              <a:lnSpc>
+                <a:spcPct val="150000"/>
+              </a:lnSpc>
+              <a:buFont typeface="Arial" panose="020B0604020202020204" pitchFamily="34" charset="0"/>
+              <a:buChar char="•"/>
+            </a:pPr>
+            <a:r>
+              <a:rPr lang="en-US" sz="2000" dirty="0"/>
+              <a:t>Stored Procedures </a:t>
+            </a:r>
+          </a:p>
+          <a:p>
+            <a:pPr marL="285750" indent="-285750">
+              <a:lnSpc>
+                <a:spcPct val="150000"/>
+              </a:lnSpc>
+              <a:buFont typeface="Arial" panose="020B0604020202020204" pitchFamily="34" charset="0"/>
+              <a:buChar char="•"/>
+            </a:pPr>
+            <a:r>
+              <a:rPr lang="en-US" sz="2000" dirty="0"/>
+              <a:t>Derived Tables </a:t>
+            </a:r>
+          </a:p>
+          <a:p>
+            <a:pPr>
+              <a:lnSpc>
+                <a:spcPct val="150000"/>
+              </a:lnSpc>
+            </a:pPr>
+            <a:r>
+              <a:rPr lang="en-US" sz="2000" b="1" dirty="0"/>
+              <a:t>Window Functions</a:t>
+            </a:r>
+          </a:p>
+          <a:p>
+            <a:pPr marL="285750" indent="-285750">
+              <a:lnSpc>
+                <a:spcPct val="150000"/>
+              </a:lnSpc>
+              <a:buFont typeface="Arial" panose="020B0604020202020204" pitchFamily="34" charset="0"/>
+              <a:buChar char="•"/>
+            </a:pPr>
+            <a:r>
+              <a:rPr lang="en-US" sz="2000" dirty="0"/>
+              <a:t>ROW_NUMBER() </a:t>
+            </a:r>
+          </a:p>
+          <a:p>
+            <a:pPr marL="285750" indent="-285750">
+              <a:lnSpc>
+                <a:spcPct val="150000"/>
+              </a:lnSpc>
+              <a:buFont typeface="Arial" panose="020B0604020202020204" pitchFamily="34" charset="0"/>
+              <a:buChar char="•"/>
+            </a:pPr>
+            <a:r>
+              <a:rPr lang="en-US" sz="2000" dirty="0"/>
+              <a:t>RANK() </a:t>
+            </a:r>
+          </a:p>
+          <a:p>
+            <a:pPr marL="285750" indent="-285750">
+              <a:lnSpc>
+                <a:spcPct val="150000"/>
+              </a:lnSpc>
+              <a:buFont typeface="Arial" panose="020B0604020202020204" pitchFamily="34" charset="0"/>
+              <a:buChar char="•"/>
+            </a:pPr>
+            <a:r>
+              <a:rPr lang="en-US" sz="2000" dirty="0"/>
+              <a:t>LEAD() </a:t>
+            </a:r>
+          </a:p>
+          <a:p>
+            <a:pPr marL="285750" indent="-285750">
+              <a:lnSpc>
+                <a:spcPct val="150000"/>
+              </a:lnSpc>
+              <a:buFont typeface="Arial" panose="020B0604020202020204" pitchFamily="34" charset="0"/>
+              <a:buChar char="•"/>
+            </a:pPr>
+            <a:r>
+              <a:rPr lang="en-US" sz="2000" dirty="0"/>
+              <a:t>AVG() OVER()</a:t>
+            </a:r>
+          </a:p>
+        </p:txBody>
+      </p:sp>
+    </p:spTree>
+    <p:extLst>
+      <p:ext uri="{BB962C8B-B14F-4D97-AF65-F5344CB8AC3E}">
+        <p14:creationId xmlns:p14="http://schemas.microsoft.com/office/powerpoint/2010/main" val="3809910618"/>
+      </p:ext>
+    </p:extLst>
+  </p:cSld>
+  <p:clrMapOvr>
+    <a:masterClrMapping/>
+  </p:clrMapOvr>
+</p:sld>
+</file>
+
+<file path=ppt/slides/slide9.xml><?xml version="1.0" encoding="utf-8"?>
 <p:sld xmlns:a="http://schemas.openxmlformats.org/drawingml/2006/main" xmlns:r="http://schemas.openxmlformats.org/officeDocument/2006/relationships" xmlns:p="http://schemas.openxmlformats.org/presentationml/2006/main">
   <p:cSld>
     <p:spTree>
@@ -18039,6 +19375,9 @@
             </a:r>
           </a:p>
           <a:p>
+            <a:pPr marL="114300" indent="0">
+              <a:buNone/>
+            </a:pPr>
             <a:r>
               <a:rPr lang="en-US" sz="2000" b="1" dirty="0"/>
               <a:t>Consumer Analysis</a:t>
@@ -18125,952 +19464,6 @@
     <p:extLst>
       <p:ext uri="{BB962C8B-B14F-4D97-AF65-F5344CB8AC3E}">
         <p14:creationId xmlns:p14="http://schemas.microsoft.com/office/powerpoint/2010/main" val="1831861383"/>
-      </p:ext>
-    </p:extLst>
-  </p:cSld>
-  <p:clrMapOvr>
-    <a:masterClrMapping/>
-  </p:clrMapOvr>
-</p:sld>
-</file>
-
-<file path=ppt/slides/slide6.xml><?xml version="1.0" encoding="utf-8"?>
-<p:sld xmlns:a="http://schemas.openxmlformats.org/drawingml/2006/main" xmlns:r="http://schemas.openxmlformats.org/officeDocument/2006/relationships" xmlns:p="http://schemas.openxmlformats.org/presentationml/2006/main">
-  <p:cSld>
-    <p:spTree>
-      <p:nvGrpSpPr>
-        <p:cNvPr id="1" name=""/>
-        <p:cNvGrpSpPr/>
-        <p:nvPr/>
-      </p:nvGrpSpPr>
-      <p:grpSpPr>
-        <a:xfrm>
-          <a:off x="0" y="0"/>
-          <a:ext cx="0" cy="0"/>
-          <a:chOff x="0" y="0"/>
-          <a:chExt cx="0" cy="0"/>
-        </a:xfrm>
-      </p:grpSpPr>
-      <p:sp>
-        <p:nvSpPr>
-          <p:cNvPr id="2" name="Title 1">
-            <a:extLst>
-              <a:ext uri="{FF2B5EF4-FFF2-40B4-BE49-F238E27FC236}">
-                <a16:creationId xmlns:a16="http://schemas.microsoft.com/office/drawing/2014/main" id="{1A163A70-9A64-23E4-7998-54FB530BB434}"/>
-              </a:ext>
-            </a:extLst>
-          </p:cNvPr>
-          <p:cNvSpPr>
-            <a:spLocks noGrp="1"/>
-          </p:cNvSpPr>
-          <p:nvPr>
-            <p:ph type="title"/>
-          </p:nvPr>
-        </p:nvSpPr>
-        <p:spPr>
-          <a:xfrm>
-            <a:off x="404567" y="57003"/>
-            <a:ext cx="10515600" cy="1325563"/>
-          </a:xfrm>
-        </p:spPr>
-        <p:txBody>
-          <a:bodyPr/>
-          <a:lstStyle/>
-          <a:p>
-            <a:r>
-              <a:rPr lang="en-US" b="1" dirty="0">
-                <a:solidFill>
-                  <a:srgbClr val="FF0000"/>
-                </a:solidFill>
-              </a:rPr>
-              <a:t>KEY ANALYSIS QUESTIONS</a:t>
-            </a:r>
-          </a:p>
-        </p:txBody>
-      </p:sp>
-      <p:sp>
-        <p:nvSpPr>
-          <p:cNvPr id="3" name="Text Placeholder 2">
-            <a:extLst>
-              <a:ext uri="{FF2B5EF4-FFF2-40B4-BE49-F238E27FC236}">
-                <a16:creationId xmlns:a16="http://schemas.microsoft.com/office/drawing/2014/main" id="{A2D3E0BF-FF36-92BD-8C6F-4AFEC5B76D1D}"/>
-              </a:ext>
-            </a:extLst>
-          </p:cNvPr>
-          <p:cNvSpPr>
-            <a:spLocks noGrp="1"/>
-          </p:cNvSpPr>
-          <p:nvPr>
-            <p:ph type="body" idx="1"/>
-          </p:nvPr>
-        </p:nvSpPr>
-        <p:spPr>
-          <a:xfrm>
-            <a:off x="725078" y="986640"/>
-            <a:ext cx="10515600" cy="5814357"/>
-          </a:xfrm>
-        </p:spPr>
-        <p:txBody>
-          <a:bodyPr>
-            <a:noAutofit/>
-          </a:bodyPr>
-          <a:lstStyle/>
-          <a:p>
-            <a:pPr marL="114300" indent="0">
-              <a:buNone/>
-            </a:pPr>
-            <a:r>
-              <a:rPr lang="en-US" sz="2000" b="1" dirty="0"/>
-              <a:t>Key Analysis Questions / Use Cases</a:t>
-            </a:r>
-          </a:p>
-          <a:p>
-            <a:pPr marL="114300" indent="0">
-              <a:buNone/>
-            </a:pPr>
-            <a:r>
-              <a:rPr lang="en-US" sz="2000" b="1" dirty="0"/>
-              <a:t>Rating Analysis</a:t>
-            </a:r>
-          </a:p>
-          <a:p>
-            <a:r>
-              <a:rPr lang="en-US" sz="2000" dirty="0"/>
-              <a:t>Find restaurants rated in specific cities </a:t>
-            </a:r>
-          </a:p>
-          <a:p>
-            <a:r>
-              <a:rPr lang="en-US" sz="2000" dirty="0"/>
-              <a:t>Find consumers with food ratings below the average </a:t>
-            </a:r>
-          </a:p>
-          <a:p>
-            <a:r>
-              <a:rPr lang="en-US" sz="2000" dirty="0"/>
-              <a:t>Identify consumers who rated non-Italian restaurants </a:t>
-            </a:r>
-          </a:p>
-          <a:p>
-            <a:r>
-              <a:rPr lang="en-US" sz="2000" dirty="0"/>
-              <a:t>Compare food and service ratings </a:t>
-            </a:r>
-          </a:p>
-          <a:p>
-            <a:r>
-              <a:rPr lang="en-US" sz="2000" dirty="0"/>
-              <a:t>Find restaurants performing above the average </a:t>
-            </a:r>
-          </a:p>
-          <a:p>
-            <a:pPr marL="114300" indent="0">
-              <a:lnSpc>
-                <a:spcPct val="150000"/>
-              </a:lnSpc>
-              <a:buNone/>
-            </a:pPr>
-            <a:r>
-              <a:rPr lang="en-US" sz="2000" b="1" dirty="0"/>
-              <a:t>Advanced Analysis</a:t>
-            </a:r>
-          </a:p>
-          <a:p>
-            <a:r>
-              <a:rPr lang="en-US" sz="2000" dirty="0"/>
-              <a:t>Rank restaurants based on ratings </a:t>
-            </a:r>
-          </a:p>
-          <a:p>
-            <a:r>
-              <a:rPr lang="en-US" sz="2000" dirty="0"/>
-              <a:t>Analyze rating patterns within restaurants </a:t>
-            </a:r>
-          </a:p>
-          <a:p>
-            <a:r>
-              <a:rPr lang="en-US" sz="2000" dirty="0"/>
-              <a:t>Find top preferred cuisines </a:t>
-            </a:r>
-          </a:p>
-          <a:p>
-            <a:r>
-              <a:rPr lang="en-US" sz="2000" dirty="0"/>
-              <a:t>Compare consumer and restaurant performance </a:t>
-            </a:r>
-          </a:p>
-          <a:p>
-            <a:r>
-              <a:rPr lang="en-US" sz="2000" dirty="0"/>
-              <a:t>Use multiple tables to answer complex questions</a:t>
-            </a:r>
-          </a:p>
-          <a:p>
-            <a:endParaRPr lang="en-US" sz="2000" dirty="0"/>
-          </a:p>
-        </p:txBody>
-      </p:sp>
-    </p:spTree>
-    <p:extLst>
-      <p:ext uri="{BB962C8B-B14F-4D97-AF65-F5344CB8AC3E}">
-        <p14:creationId xmlns:p14="http://schemas.microsoft.com/office/powerpoint/2010/main" val="1229960937"/>
-      </p:ext>
-    </p:extLst>
-  </p:cSld>
-  <p:clrMapOvr>
-    <a:masterClrMapping/>
-  </p:clrMapOvr>
-</p:sld>
-</file>
-
-<file path=ppt/slides/slide7.xml><?xml version="1.0" encoding="utf-8"?>
-<p:sld xmlns:a="http://schemas.openxmlformats.org/drawingml/2006/main" xmlns:r="http://schemas.openxmlformats.org/officeDocument/2006/relationships" xmlns:p="http://schemas.openxmlformats.org/presentationml/2006/main">
-  <p:cSld>
-    <p:spTree>
-      <p:nvGrpSpPr>
-        <p:cNvPr id="1" name=""/>
-        <p:cNvGrpSpPr/>
-        <p:nvPr/>
-      </p:nvGrpSpPr>
-      <p:grpSpPr>
-        <a:xfrm>
-          <a:off x="0" y="0"/>
-          <a:ext cx="0" cy="0"/>
-          <a:chOff x="0" y="0"/>
-          <a:chExt cx="0" cy="0"/>
-        </a:xfrm>
-      </p:grpSpPr>
-      <p:sp>
-        <p:nvSpPr>
-          <p:cNvPr id="2" name="Title 1">
-            <a:extLst>
-              <a:ext uri="{FF2B5EF4-FFF2-40B4-BE49-F238E27FC236}">
-                <a16:creationId xmlns:a16="http://schemas.microsoft.com/office/drawing/2014/main" id="{B1689F01-39C0-35B9-3137-16CDB1EF6281}"/>
-              </a:ext>
-            </a:extLst>
-          </p:cNvPr>
-          <p:cNvSpPr>
-            <a:spLocks noGrp="1"/>
-          </p:cNvSpPr>
-          <p:nvPr>
-            <p:ph type="title"/>
-          </p:nvPr>
-        </p:nvSpPr>
-        <p:spPr>
-          <a:xfrm>
-            <a:off x="395140" y="18255"/>
-            <a:ext cx="10515600" cy="1325563"/>
-          </a:xfrm>
-        </p:spPr>
-        <p:txBody>
-          <a:bodyPr/>
-          <a:lstStyle/>
-          <a:p>
-            <a:r>
-              <a:rPr lang="en-US" b="1" dirty="0">
-                <a:solidFill>
-                  <a:srgbClr val="FF0000"/>
-                </a:solidFill>
-              </a:rPr>
-              <a:t>SQL ANALYSIS &amp; CONCEPTS USED</a:t>
-            </a:r>
-          </a:p>
-        </p:txBody>
-      </p:sp>
-      <p:sp>
-        <p:nvSpPr>
-          <p:cNvPr id="3" name="Text Placeholder 2">
-            <a:extLst>
-              <a:ext uri="{FF2B5EF4-FFF2-40B4-BE49-F238E27FC236}">
-                <a16:creationId xmlns:a16="http://schemas.microsoft.com/office/drawing/2014/main" id="{E2F2697D-D078-3C09-0FCC-8EC9721289D0}"/>
-              </a:ext>
-            </a:extLst>
-          </p:cNvPr>
-          <p:cNvSpPr>
-            <a:spLocks noGrp="1"/>
-          </p:cNvSpPr>
-          <p:nvPr>
-            <p:ph type="body" idx="1"/>
-          </p:nvPr>
-        </p:nvSpPr>
-        <p:spPr>
-          <a:xfrm>
-            <a:off x="847627" y="1052626"/>
-            <a:ext cx="4959284" cy="5376453"/>
-          </a:xfrm>
-        </p:spPr>
-        <p:txBody>
-          <a:bodyPr>
-            <a:noAutofit/>
-          </a:bodyPr>
-          <a:lstStyle/>
-          <a:p>
-            <a:pPr marL="114300" indent="0">
-              <a:buNone/>
-            </a:pPr>
-            <a:r>
-              <a:rPr lang="en-US" sz="2000" b="1" dirty="0"/>
-              <a:t>SQL Concepts Used</a:t>
-            </a:r>
-          </a:p>
-          <a:p>
-            <a:pPr marL="114300" indent="0">
-              <a:buNone/>
-            </a:pPr>
-            <a:r>
-              <a:rPr lang="en-US" sz="2000" b="1" dirty="0"/>
-              <a:t>Basic SQL</a:t>
-            </a:r>
-          </a:p>
-          <a:p>
-            <a:r>
-              <a:rPr lang="en-US" sz="2000" dirty="0"/>
-              <a:t>SELECT </a:t>
-            </a:r>
-          </a:p>
-          <a:p>
-            <a:r>
-              <a:rPr lang="en-US" sz="2000" dirty="0"/>
-              <a:t>WHERE </a:t>
-            </a:r>
-          </a:p>
-          <a:p>
-            <a:r>
-              <a:rPr lang="en-US" sz="2000" dirty="0"/>
-              <a:t>ORDER BY </a:t>
-            </a:r>
-          </a:p>
-          <a:p>
-            <a:r>
-              <a:rPr lang="en-US" sz="2000" dirty="0"/>
-              <a:t>GROUP BY </a:t>
-            </a:r>
-          </a:p>
-          <a:p>
-            <a:r>
-              <a:rPr lang="en-US" sz="2000" dirty="0"/>
-              <a:t>HAVING </a:t>
-            </a:r>
-          </a:p>
-          <a:p>
-            <a:pPr marL="114300" indent="0">
-              <a:buNone/>
-            </a:pPr>
-            <a:r>
-              <a:rPr lang="en-US" sz="2000" b="1" dirty="0"/>
-              <a:t>JOINs &amp; Subqueries</a:t>
-            </a:r>
-          </a:p>
-          <a:p>
-            <a:r>
-              <a:rPr lang="en-US" sz="2000" dirty="0"/>
-              <a:t>INNER JOIN ,LEFT JOIN,RIGHT JOIN </a:t>
-            </a:r>
-          </a:p>
-          <a:p>
-            <a:r>
-              <a:rPr lang="en-US" sz="2000" dirty="0"/>
-              <a:t>Subqueries </a:t>
-            </a:r>
-          </a:p>
-          <a:p>
-            <a:r>
-              <a:rPr lang="en-US" sz="2000" dirty="0"/>
-              <a:t>IN </a:t>
-            </a:r>
-          </a:p>
-          <a:p>
-            <a:r>
-              <a:rPr lang="en-US" sz="2000" dirty="0"/>
-              <a:t>NOT IN </a:t>
-            </a:r>
-          </a:p>
-          <a:p>
-            <a:r>
-              <a:rPr lang="en-US" sz="2000" dirty="0"/>
-              <a:t>EXISTS </a:t>
-            </a:r>
-          </a:p>
-          <a:p>
-            <a:endParaRPr lang="en-US" sz="2000" dirty="0"/>
-          </a:p>
-        </p:txBody>
-      </p:sp>
-      <p:sp>
-        <p:nvSpPr>
-          <p:cNvPr id="5" name="TextBox 4">
-            <a:extLst>
-              <a:ext uri="{FF2B5EF4-FFF2-40B4-BE49-F238E27FC236}">
-                <a16:creationId xmlns:a16="http://schemas.microsoft.com/office/drawing/2014/main" id="{B8C33995-B0BC-3DE9-E2AD-2DDC1792FAC2}"/>
-              </a:ext>
-            </a:extLst>
-          </p:cNvPr>
-          <p:cNvSpPr txBox="1"/>
-          <p:nvPr/>
-        </p:nvSpPr>
-        <p:spPr>
-          <a:xfrm>
-            <a:off x="6746450" y="1052626"/>
-            <a:ext cx="6094428" cy="5113644"/>
-          </a:xfrm>
-          <a:prstGeom prst="rect">
-            <a:avLst/>
-          </a:prstGeom>
-          <a:noFill/>
-        </p:spPr>
-        <p:txBody>
-          <a:bodyPr wrap="square">
-            <a:spAutoFit/>
-          </a:bodyPr>
-          <a:lstStyle/>
-          <a:p>
-            <a:pPr>
-              <a:lnSpc>
-                <a:spcPct val="150000"/>
-              </a:lnSpc>
-            </a:pPr>
-            <a:r>
-              <a:rPr lang="en-US" sz="2000" b="1" dirty="0"/>
-              <a:t>Advanced SQL</a:t>
-            </a:r>
-          </a:p>
-          <a:p>
-            <a:pPr marL="285750" indent="-285750">
-              <a:lnSpc>
-                <a:spcPct val="150000"/>
-              </a:lnSpc>
-              <a:buFont typeface="Arial" panose="020B0604020202020204" pitchFamily="34" charset="0"/>
-              <a:buChar char="•"/>
-            </a:pPr>
-            <a:r>
-              <a:rPr lang="en-US" sz="2000" dirty="0"/>
-              <a:t>CTEs </a:t>
-            </a:r>
-          </a:p>
-          <a:p>
-            <a:pPr marL="285750" indent="-285750">
-              <a:lnSpc>
-                <a:spcPct val="150000"/>
-              </a:lnSpc>
-              <a:buFont typeface="Arial" panose="020B0604020202020204" pitchFamily="34" charset="0"/>
-              <a:buChar char="•"/>
-            </a:pPr>
-            <a:r>
-              <a:rPr lang="en-US" sz="2000" dirty="0"/>
-              <a:t>Window Functions </a:t>
-            </a:r>
-          </a:p>
-          <a:p>
-            <a:pPr marL="285750" indent="-285750">
-              <a:lnSpc>
-                <a:spcPct val="150000"/>
-              </a:lnSpc>
-              <a:buFont typeface="Arial" panose="020B0604020202020204" pitchFamily="34" charset="0"/>
-              <a:buChar char="•"/>
-            </a:pPr>
-            <a:r>
-              <a:rPr lang="en-US" sz="2000" dirty="0"/>
-              <a:t>Views </a:t>
-            </a:r>
-          </a:p>
-          <a:p>
-            <a:pPr marL="285750" indent="-285750">
-              <a:lnSpc>
-                <a:spcPct val="150000"/>
-              </a:lnSpc>
-              <a:buFont typeface="Arial" panose="020B0604020202020204" pitchFamily="34" charset="0"/>
-              <a:buChar char="•"/>
-            </a:pPr>
-            <a:r>
-              <a:rPr lang="en-US" sz="2000" dirty="0"/>
-              <a:t>Stored Procedures </a:t>
-            </a:r>
-          </a:p>
-          <a:p>
-            <a:pPr marL="285750" indent="-285750">
-              <a:lnSpc>
-                <a:spcPct val="150000"/>
-              </a:lnSpc>
-              <a:buFont typeface="Arial" panose="020B0604020202020204" pitchFamily="34" charset="0"/>
-              <a:buChar char="•"/>
-            </a:pPr>
-            <a:r>
-              <a:rPr lang="en-US" sz="2000" dirty="0"/>
-              <a:t>Derived Tables </a:t>
-            </a:r>
-          </a:p>
-          <a:p>
-            <a:pPr>
-              <a:lnSpc>
-                <a:spcPct val="150000"/>
-              </a:lnSpc>
-            </a:pPr>
-            <a:r>
-              <a:rPr lang="en-US" sz="2000" b="1" dirty="0"/>
-              <a:t>Window Functions</a:t>
-            </a:r>
-          </a:p>
-          <a:p>
-            <a:pPr marL="285750" indent="-285750">
-              <a:lnSpc>
-                <a:spcPct val="150000"/>
-              </a:lnSpc>
-              <a:buFont typeface="Arial" panose="020B0604020202020204" pitchFamily="34" charset="0"/>
-              <a:buChar char="•"/>
-            </a:pPr>
-            <a:r>
-              <a:rPr lang="en-US" sz="2000" dirty="0"/>
-              <a:t>ROW_NUMBER() </a:t>
-            </a:r>
-          </a:p>
-          <a:p>
-            <a:pPr marL="285750" indent="-285750">
-              <a:lnSpc>
-                <a:spcPct val="150000"/>
-              </a:lnSpc>
-              <a:buFont typeface="Arial" panose="020B0604020202020204" pitchFamily="34" charset="0"/>
-              <a:buChar char="•"/>
-            </a:pPr>
-            <a:r>
-              <a:rPr lang="en-US" sz="2000" dirty="0"/>
-              <a:t>RANK() </a:t>
-            </a:r>
-          </a:p>
-          <a:p>
-            <a:pPr marL="285750" indent="-285750">
-              <a:lnSpc>
-                <a:spcPct val="150000"/>
-              </a:lnSpc>
-              <a:buFont typeface="Arial" panose="020B0604020202020204" pitchFamily="34" charset="0"/>
-              <a:buChar char="•"/>
-            </a:pPr>
-            <a:r>
-              <a:rPr lang="en-US" sz="2000" dirty="0"/>
-              <a:t>LEAD() </a:t>
-            </a:r>
-          </a:p>
-          <a:p>
-            <a:pPr marL="285750" indent="-285750">
-              <a:lnSpc>
-                <a:spcPct val="150000"/>
-              </a:lnSpc>
-              <a:buFont typeface="Arial" panose="020B0604020202020204" pitchFamily="34" charset="0"/>
-              <a:buChar char="•"/>
-            </a:pPr>
-            <a:r>
-              <a:rPr lang="en-US" sz="2000" dirty="0"/>
-              <a:t>AVG() OVER()</a:t>
-            </a:r>
-          </a:p>
-        </p:txBody>
-      </p:sp>
-    </p:spTree>
-    <p:extLst>
-      <p:ext uri="{BB962C8B-B14F-4D97-AF65-F5344CB8AC3E}">
-        <p14:creationId xmlns:p14="http://schemas.microsoft.com/office/powerpoint/2010/main" val="3809910618"/>
-      </p:ext>
-    </p:extLst>
-  </p:cSld>
-  <p:clrMapOvr>
-    <a:masterClrMapping/>
-  </p:clrMapOvr>
-</p:sld>
-</file>
-
-<file path=ppt/slides/slide8.xml><?xml version="1.0" encoding="utf-8"?>
-<p:sld xmlns:a="http://schemas.openxmlformats.org/drawingml/2006/main" xmlns:r="http://schemas.openxmlformats.org/officeDocument/2006/relationships" xmlns:p="http://schemas.openxmlformats.org/presentationml/2006/main">
-  <p:cSld>
-    <p:spTree>
-      <p:nvGrpSpPr>
-        <p:cNvPr id="1" name=""/>
-        <p:cNvGrpSpPr/>
-        <p:nvPr/>
-      </p:nvGrpSpPr>
-      <p:grpSpPr>
-        <a:xfrm>
-          <a:off x="0" y="0"/>
-          <a:ext cx="0" cy="0"/>
-          <a:chOff x="0" y="0"/>
-          <a:chExt cx="0" cy="0"/>
-        </a:xfrm>
-      </p:grpSpPr>
-      <p:sp>
-        <p:nvSpPr>
-          <p:cNvPr id="2" name="Title 1">
-            <a:extLst>
-              <a:ext uri="{FF2B5EF4-FFF2-40B4-BE49-F238E27FC236}">
-                <a16:creationId xmlns:a16="http://schemas.microsoft.com/office/drawing/2014/main" id="{A639F0B5-8A63-94DF-2893-3AC2C008DB22}"/>
-              </a:ext>
-            </a:extLst>
-          </p:cNvPr>
-          <p:cNvSpPr>
-            <a:spLocks noGrp="1"/>
-          </p:cNvSpPr>
-          <p:nvPr>
-            <p:ph type="title"/>
-          </p:nvPr>
-        </p:nvSpPr>
-        <p:spPr>
-          <a:xfrm>
-            <a:off x="357433" y="18255"/>
-            <a:ext cx="10515600" cy="1325563"/>
-          </a:xfrm>
-        </p:spPr>
-        <p:txBody>
-          <a:bodyPr/>
-          <a:lstStyle/>
-          <a:p>
-            <a:r>
-              <a:rPr lang="en-US" b="1" dirty="0">
-                <a:solidFill>
-                  <a:srgbClr val="FF0000"/>
-                </a:solidFill>
-              </a:rPr>
-              <a:t>OVERALL KEY FINDINGS</a:t>
-            </a:r>
-          </a:p>
-        </p:txBody>
-      </p:sp>
-      <p:sp>
-        <p:nvSpPr>
-          <p:cNvPr id="3" name="Text Placeholder 2">
-            <a:extLst>
-              <a:ext uri="{FF2B5EF4-FFF2-40B4-BE49-F238E27FC236}">
-                <a16:creationId xmlns:a16="http://schemas.microsoft.com/office/drawing/2014/main" id="{66D51BC1-6A4C-4009-A63A-1F0912A8EA78}"/>
-              </a:ext>
-            </a:extLst>
-          </p:cNvPr>
-          <p:cNvSpPr>
-            <a:spLocks noGrp="1"/>
-          </p:cNvSpPr>
-          <p:nvPr>
-            <p:ph type="body" idx="1"/>
-          </p:nvPr>
-        </p:nvSpPr>
-        <p:spPr>
-          <a:xfrm>
-            <a:off x="687371" y="999242"/>
-            <a:ext cx="10515600" cy="5495826"/>
-          </a:xfrm>
-        </p:spPr>
-        <p:txBody>
-          <a:bodyPr>
-            <a:noAutofit/>
-          </a:bodyPr>
-          <a:lstStyle/>
-          <a:p>
-            <a:pPr marL="114300" indent="0">
-              <a:buNone/>
-            </a:pPr>
-            <a:r>
-              <a:rPr lang="en-US" sz="2000" b="1" dirty="0"/>
-              <a:t>Key Findings Overall</a:t>
-            </a:r>
-          </a:p>
-          <a:p>
-            <a:pPr marL="114300" indent="0">
-              <a:buNone/>
-            </a:pPr>
-            <a:r>
-              <a:rPr lang="en-US" sz="2000" b="1" dirty="0"/>
-              <a:t>Consumer Insights</a:t>
-            </a:r>
-          </a:p>
-          <a:p>
-            <a:r>
-              <a:rPr lang="en-US" sz="2000" dirty="0"/>
-              <a:t>Students showed a preference for </a:t>
-            </a:r>
-            <a:r>
-              <a:rPr lang="en-US" sz="2000" b="1" dirty="0"/>
-              <a:t>low-budget and pizzeria options</a:t>
-            </a:r>
-            <a:r>
-              <a:rPr lang="en-US" sz="2000" dirty="0"/>
-              <a:t> </a:t>
-            </a:r>
-          </a:p>
-          <a:p>
-            <a:r>
-              <a:rPr lang="en-US" sz="2000" dirty="0"/>
-              <a:t>Medium-budget consumers were active in restaurant ratings </a:t>
-            </a:r>
-          </a:p>
-          <a:p>
-            <a:r>
-              <a:rPr lang="en-US" sz="2000" dirty="0"/>
-              <a:t>Consumer demographics helped identify different preference patterns </a:t>
-            </a:r>
-          </a:p>
-          <a:p>
-            <a:pPr marL="114300" indent="0">
-              <a:lnSpc>
-                <a:spcPct val="100000"/>
-              </a:lnSpc>
-              <a:buNone/>
-            </a:pPr>
-            <a:r>
-              <a:rPr lang="en-US" sz="2000" b="1" dirty="0"/>
-              <a:t>Restaurant Insights</a:t>
-            </a:r>
-          </a:p>
-          <a:p>
-            <a:r>
-              <a:rPr lang="en-US" sz="2000" dirty="0"/>
-              <a:t>Mexican cuisine showed strong ratings in the analysis </a:t>
-            </a:r>
-          </a:p>
-          <a:p>
-            <a:r>
-              <a:rPr lang="en-US" sz="2000" dirty="0"/>
-              <a:t>Pizzeria restaurants attracted the student segment </a:t>
-            </a:r>
-          </a:p>
-          <a:p>
-            <a:r>
-              <a:rPr lang="en-US" sz="2000" dirty="0"/>
-              <a:t>Franchise restaurants showed more consistent quality </a:t>
-            </a:r>
-          </a:p>
-          <a:p>
-            <a:pPr marL="114300" indent="0">
-              <a:lnSpc>
-                <a:spcPct val="100000"/>
-              </a:lnSpc>
-              <a:buNone/>
-            </a:pPr>
-            <a:r>
-              <a:rPr lang="en-US" sz="2000" b="1" dirty="0"/>
-              <a:t>Rating Insights</a:t>
-            </a:r>
-          </a:p>
-          <a:p>
-            <a:r>
-              <a:rPr lang="en-US" sz="2000" dirty="0"/>
-              <a:t>Highly satisfactory ratings were common </a:t>
-            </a:r>
-          </a:p>
-          <a:p>
-            <a:r>
-              <a:rPr lang="en-US" sz="2000" dirty="0"/>
-              <a:t>Food and service ratings showed a strong relationship </a:t>
-            </a:r>
-          </a:p>
-          <a:p>
-            <a:r>
-              <a:rPr lang="en-US" sz="2000" dirty="0"/>
-              <a:t>SQL ranking helped identify different restaurant and consumer patterns</a:t>
-            </a:r>
-          </a:p>
-          <a:p>
-            <a:endParaRPr lang="en-US" sz="2000" dirty="0"/>
-          </a:p>
-        </p:txBody>
-      </p:sp>
-    </p:spTree>
-    <p:extLst>
-      <p:ext uri="{BB962C8B-B14F-4D97-AF65-F5344CB8AC3E}">
-        <p14:creationId xmlns:p14="http://schemas.microsoft.com/office/powerpoint/2010/main" val="506912973"/>
-      </p:ext>
-    </p:extLst>
-  </p:cSld>
-  <p:clrMapOvr>
-    <a:masterClrMapping/>
-  </p:clrMapOvr>
-</p:sld>
-</file>
-
-<file path=ppt/slides/slide9.xml><?xml version="1.0" encoding="utf-8"?>
-<p:sld xmlns:a="http://schemas.openxmlformats.org/drawingml/2006/main" xmlns:r="http://schemas.openxmlformats.org/officeDocument/2006/relationships" xmlns:p="http://schemas.openxmlformats.org/presentationml/2006/main">
-  <p:cSld>
-    <p:spTree>
-      <p:nvGrpSpPr>
-        <p:cNvPr id="1" name="">
-          <a:extLst>
-            <a:ext uri="{FF2B5EF4-FFF2-40B4-BE49-F238E27FC236}">
-              <a16:creationId xmlns:a16="http://schemas.microsoft.com/office/drawing/2014/main" id="{88255C3C-1F91-0724-B860-CAB57270C8D5}"/>
-            </a:ext>
-          </a:extLst>
-        </p:cNvPr>
-        <p:cNvGrpSpPr/>
-        <p:nvPr/>
-      </p:nvGrpSpPr>
-      <p:grpSpPr>
-        <a:xfrm>
-          <a:off x="0" y="0"/>
-          <a:ext cx="0" cy="0"/>
-          <a:chOff x="0" y="0"/>
-          <a:chExt cx="0" cy="0"/>
-        </a:xfrm>
-      </p:grpSpPr>
-      <p:sp>
-        <p:nvSpPr>
-          <p:cNvPr id="2" name="Title 1">
-            <a:extLst>
-              <a:ext uri="{FF2B5EF4-FFF2-40B4-BE49-F238E27FC236}">
-                <a16:creationId xmlns:a16="http://schemas.microsoft.com/office/drawing/2014/main" id="{DBAAE639-3F5F-6371-7C0F-57A3E71B4D64}"/>
-              </a:ext>
-            </a:extLst>
-          </p:cNvPr>
-          <p:cNvSpPr>
-            <a:spLocks noGrp="1"/>
-          </p:cNvSpPr>
-          <p:nvPr>
-            <p:ph type="title"/>
-          </p:nvPr>
-        </p:nvSpPr>
-        <p:spPr>
-          <a:xfrm>
-            <a:off x="357433" y="18255"/>
-            <a:ext cx="10515600" cy="1325563"/>
-          </a:xfrm>
-        </p:spPr>
-        <p:txBody>
-          <a:bodyPr/>
-          <a:lstStyle/>
-          <a:p>
-            <a:r>
-              <a:rPr lang="en-US" b="1" dirty="0">
-                <a:solidFill>
-                  <a:srgbClr val="FF0000"/>
-                </a:solidFill>
-              </a:rPr>
-              <a:t>CONCLUSION</a:t>
-            </a:r>
-          </a:p>
-        </p:txBody>
-      </p:sp>
-      <p:sp>
-        <p:nvSpPr>
-          <p:cNvPr id="3" name="Text Placeholder 2">
-            <a:extLst>
-              <a:ext uri="{FF2B5EF4-FFF2-40B4-BE49-F238E27FC236}">
-                <a16:creationId xmlns:a16="http://schemas.microsoft.com/office/drawing/2014/main" id="{DC00618E-8E28-8BC8-1954-16943963DB6A}"/>
-              </a:ext>
-            </a:extLst>
-          </p:cNvPr>
-          <p:cNvSpPr>
-            <a:spLocks noGrp="1"/>
-          </p:cNvSpPr>
-          <p:nvPr>
-            <p:ph type="body" idx="1"/>
-          </p:nvPr>
-        </p:nvSpPr>
-        <p:spPr>
-          <a:xfrm>
-            <a:off x="753359" y="1343818"/>
-            <a:ext cx="10515600" cy="4833145"/>
-          </a:xfrm>
-        </p:spPr>
-        <p:txBody>
-          <a:bodyPr>
-            <a:normAutofit/>
-          </a:bodyPr>
-          <a:lstStyle/>
-          <a:p>
-            <a:pPr marL="114300" indent="0">
-              <a:buNone/>
-            </a:pPr>
-            <a:r>
-              <a:rPr lang="en-US" sz="2000" b="1" dirty="0"/>
-              <a:t>Conclusion</a:t>
-            </a:r>
-          </a:p>
-          <a:p>
-            <a:r>
-              <a:rPr lang="en-US" sz="2000" dirty="0"/>
-              <a:t>The project helped me analyze restaurant and consumer data using SQL. </a:t>
-            </a:r>
-          </a:p>
-          <a:p>
-            <a:r>
-              <a:rPr lang="en-US" sz="2000" dirty="0"/>
-              <a:t>I worked with multiple related tables and used different types of JOINs. </a:t>
-            </a:r>
-          </a:p>
-          <a:p>
-            <a:r>
-              <a:rPr lang="en-US" sz="2000" dirty="0"/>
-              <a:t>I used </a:t>
-            </a:r>
-            <a:r>
-              <a:rPr lang="en-US" sz="2000" b="1" dirty="0"/>
-              <a:t>aggregation, subqueries and filtering</a:t>
-            </a:r>
-            <a:r>
-              <a:rPr lang="en-US" sz="2000" dirty="0"/>
-              <a:t> to answer analysis questions. </a:t>
-            </a:r>
-          </a:p>
-          <a:p>
-            <a:r>
-              <a:rPr lang="en-US" sz="2000" dirty="0"/>
-              <a:t>I applied advanced SQL concepts such as </a:t>
-            </a:r>
-            <a:r>
-              <a:rPr lang="en-US" sz="2000" b="1" dirty="0"/>
-              <a:t>CTEs and Window Functions</a:t>
-            </a:r>
-            <a:r>
-              <a:rPr lang="en-US" sz="2000" dirty="0"/>
-              <a:t>. </a:t>
-            </a:r>
-          </a:p>
-          <a:p>
-            <a:r>
-              <a:rPr lang="en-US" sz="2000" dirty="0"/>
-              <a:t>I also worked with </a:t>
-            </a:r>
-            <a:r>
-              <a:rPr lang="en-US" sz="2000" b="1" dirty="0"/>
-              <a:t>Views and Stored Procedures</a:t>
-            </a:r>
-            <a:r>
-              <a:rPr lang="en-US" sz="2000" dirty="0"/>
-              <a:t>. </a:t>
-            </a:r>
-          </a:p>
-          <a:p>
-            <a:r>
-              <a:rPr lang="en-US" sz="2000" dirty="0"/>
-              <a:t>The analysis helped identify patterns in </a:t>
-            </a:r>
-            <a:r>
-              <a:rPr lang="en-US" sz="2000" b="1" dirty="0"/>
-              <a:t>consumer preferences, restaurant performance and ratings</a:t>
-            </a:r>
-            <a:r>
-              <a:rPr lang="en-US" sz="2000" dirty="0"/>
-              <a:t>. </a:t>
-            </a:r>
-          </a:p>
-          <a:p>
-            <a:endParaRPr lang="en-US" sz="2000" dirty="0"/>
-          </a:p>
-          <a:p>
-            <a:pPr marL="114300" indent="0">
-              <a:buNone/>
-            </a:pPr>
-            <a:r>
-              <a:rPr lang="en-US" sz="2000" b="1" dirty="0"/>
-              <a:t>Overall Learning</a:t>
-            </a:r>
-          </a:p>
-          <a:p>
-            <a:r>
-              <a:rPr lang="en-US" sz="2000" dirty="0"/>
-              <a:t>This project helped me understand how SQL can be used to analyze real-world data and generate useful insights.</a:t>
-            </a:r>
-          </a:p>
-          <a:p>
-            <a:endParaRPr lang="en-US" sz="2000" dirty="0"/>
-          </a:p>
-        </p:txBody>
-      </p:sp>
-    </p:spTree>
-    <p:extLst>
-      <p:ext uri="{BB962C8B-B14F-4D97-AF65-F5344CB8AC3E}">
-        <p14:creationId xmlns:p14="http://schemas.microsoft.com/office/powerpoint/2010/main" val="3746234198"/>
       </p:ext>
     </p:extLst>
   </p:cSld>
